--- a/M4/GDV_2D_Gym/les4/m4-gym2d-les4.pptx
+++ b/M4/GDV_2D_Gym/les4/m4-gym2d-les4.pptx
@@ -6,7 +6,10 @@
   </p:sldMasterIdLst>
   <p:sldIdLst>
     <p:sldId id="256" r:id="rId2"/>
-    <p:sldId id="257" r:id="rId3"/>
+    <p:sldId id="259" r:id="rId3"/>
+    <p:sldId id="257" r:id="rId4"/>
+    <p:sldId id="258" r:id="rId5"/>
+    <p:sldId id="260" r:id="rId6"/>
   </p:sldIdLst>
   <p:sldSz cx="12192000" cy="6858000"/>
   <p:notesSz cx="6858000" cy="9144000"/>
@@ -105,6 +108,11 @@
       </a:defRPr>
     </a:lvl9pPr>
   </p:defaultTextStyle>
+  <p:extLst>
+    <p:ext uri="{EFAFB233-063F-42B5-8137-9DF3F51BA10A}">
+      <p15:sldGuideLst xmlns:p15="http://schemas.microsoft.com/office/powerpoint/2012/main"/>
+    </p:ext>
+  </p:extLst>
 </p:presentation>
 </file>
 
@@ -255,7 +263,7 @@
           <a:p>
             <a:fld id="{289F147A-C75C-4EE1-85A0-F1BDEA974B7A}" type="datetimeFigureOut">
               <a:rPr lang="nl-NL" smtClean="0"/>
-              <a:t>21-5-2026</a:t>
+              <a:t>27-5-2026</a:t>
             </a:fld>
             <a:endParaRPr lang="nl-NL"/>
           </a:p>
@@ -453,7 +461,7 @@
           <a:p>
             <a:fld id="{289F147A-C75C-4EE1-85A0-F1BDEA974B7A}" type="datetimeFigureOut">
               <a:rPr lang="nl-NL" smtClean="0"/>
-              <a:t>21-5-2026</a:t>
+              <a:t>27-5-2026</a:t>
             </a:fld>
             <a:endParaRPr lang="nl-NL"/>
           </a:p>
@@ -661,7 +669,7 @@
           <a:p>
             <a:fld id="{289F147A-C75C-4EE1-85A0-F1BDEA974B7A}" type="datetimeFigureOut">
               <a:rPr lang="nl-NL" smtClean="0"/>
-              <a:t>21-5-2026</a:t>
+              <a:t>27-5-2026</a:t>
             </a:fld>
             <a:endParaRPr lang="nl-NL"/>
           </a:p>
@@ -859,7 +867,7 @@
           <a:p>
             <a:fld id="{289F147A-C75C-4EE1-85A0-F1BDEA974B7A}" type="datetimeFigureOut">
               <a:rPr lang="nl-NL" smtClean="0"/>
-              <a:t>21-5-2026</a:t>
+              <a:t>27-5-2026</a:t>
             </a:fld>
             <a:endParaRPr lang="nl-NL"/>
           </a:p>
@@ -1134,7 +1142,7 @@
           <a:p>
             <a:fld id="{289F147A-C75C-4EE1-85A0-F1BDEA974B7A}" type="datetimeFigureOut">
               <a:rPr lang="nl-NL" smtClean="0"/>
-              <a:t>21-5-2026</a:t>
+              <a:t>27-5-2026</a:t>
             </a:fld>
             <a:endParaRPr lang="nl-NL"/>
           </a:p>
@@ -1399,7 +1407,7 @@
           <a:p>
             <a:fld id="{289F147A-C75C-4EE1-85A0-F1BDEA974B7A}" type="datetimeFigureOut">
               <a:rPr lang="nl-NL" smtClean="0"/>
-              <a:t>21-5-2026</a:t>
+              <a:t>27-5-2026</a:t>
             </a:fld>
             <a:endParaRPr lang="nl-NL"/>
           </a:p>
@@ -1811,7 +1819,7 @@
           <a:p>
             <a:fld id="{289F147A-C75C-4EE1-85A0-F1BDEA974B7A}" type="datetimeFigureOut">
               <a:rPr lang="nl-NL" smtClean="0"/>
-              <a:t>21-5-2026</a:t>
+              <a:t>27-5-2026</a:t>
             </a:fld>
             <a:endParaRPr lang="nl-NL"/>
           </a:p>
@@ -1952,7 +1960,7 @@
           <a:p>
             <a:fld id="{289F147A-C75C-4EE1-85A0-F1BDEA974B7A}" type="datetimeFigureOut">
               <a:rPr lang="nl-NL" smtClean="0"/>
-              <a:t>21-5-2026</a:t>
+              <a:t>27-5-2026</a:t>
             </a:fld>
             <a:endParaRPr lang="nl-NL"/>
           </a:p>
@@ -2065,7 +2073,7 @@
           <a:p>
             <a:fld id="{289F147A-C75C-4EE1-85A0-F1BDEA974B7A}" type="datetimeFigureOut">
               <a:rPr lang="nl-NL" smtClean="0"/>
-              <a:t>21-5-2026</a:t>
+              <a:t>27-5-2026</a:t>
             </a:fld>
             <a:endParaRPr lang="nl-NL"/>
           </a:p>
@@ -2376,7 +2384,7 @@
           <a:p>
             <a:fld id="{289F147A-C75C-4EE1-85A0-F1BDEA974B7A}" type="datetimeFigureOut">
               <a:rPr lang="nl-NL" smtClean="0"/>
-              <a:t>21-5-2026</a:t>
+              <a:t>27-5-2026</a:t>
             </a:fld>
             <a:endParaRPr lang="nl-NL"/>
           </a:p>
@@ -2664,7 +2672,7 @@
           <a:p>
             <a:fld id="{289F147A-C75C-4EE1-85A0-F1BDEA974B7A}" type="datetimeFigureOut">
               <a:rPr lang="nl-NL" smtClean="0"/>
-              <a:t>21-5-2026</a:t>
+              <a:t>27-5-2026</a:t>
             </a:fld>
             <a:endParaRPr lang="nl-NL"/>
           </a:p>
@@ -2905,7 +2913,7 @@
           <a:p>
             <a:fld id="{289F147A-C75C-4EE1-85A0-F1BDEA974B7A}" type="datetimeFigureOut">
               <a:rPr lang="nl-NL" smtClean="0"/>
-              <a:t>21-5-2026</a:t>
+              <a:t>27-5-2026</a:t>
             </a:fld>
             <a:endParaRPr lang="nl-NL"/>
           </a:p>
@@ -3411,6 +3419,211 @@
           <p:cNvPr id="2" name="Titel 1">
             <a:extLst>
               <a:ext uri="{FF2B5EF4-FFF2-40B4-BE49-F238E27FC236}">
+                <a16:creationId xmlns:a16="http://schemas.microsoft.com/office/drawing/2014/main" id="{727478DA-1DB3-026D-352C-1B54F5338EF0}"/>
+              </a:ext>
+            </a:extLst>
+          </p:cNvPr>
+          <p:cNvSpPr>
+            <a:spLocks noGrp="1"/>
+          </p:cNvSpPr>
+          <p:nvPr>
+            <p:ph type="title"/>
+          </p:nvPr>
+        </p:nvSpPr>
+        <p:spPr/>
+        <p:txBody>
+          <a:bodyPr/>
+          <a:lstStyle/>
+          <a:p>
+            <a:r>
+              <a:rPr lang="en-US" dirty="0" err="1"/>
+              <a:t>Lesdoelen</a:t>
+            </a:r>
+            <a:r>
+              <a:rPr lang="en-US" dirty="0"/>
+              <a:t> les 4</a:t>
+            </a:r>
+            <a:endParaRPr lang="nl-NL" dirty="0"/>
+          </a:p>
+        </p:txBody>
+      </p:sp>
+      <p:sp>
+        <p:nvSpPr>
+          <p:cNvPr id="3" name="Tijdelijke aanduiding voor inhoud 2">
+            <a:extLst>
+              <a:ext uri="{FF2B5EF4-FFF2-40B4-BE49-F238E27FC236}">
+                <a16:creationId xmlns:a16="http://schemas.microsoft.com/office/drawing/2014/main" id="{EA42B017-81AF-3DDA-DD87-6DFFD5C2193D}"/>
+              </a:ext>
+            </a:extLst>
+          </p:cNvPr>
+          <p:cNvSpPr>
+            <a:spLocks noGrp="1"/>
+          </p:cNvSpPr>
+          <p:nvPr>
+            <p:ph idx="1"/>
+          </p:nvPr>
+        </p:nvSpPr>
+        <p:spPr/>
+        <p:txBody>
+          <a:bodyPr/>
+          <a:lstStyle/>
+          <a:p>
+            <a:r>
+              <a:rPr lang="en-US" dirty="0" err="1"/>
+              <a:t>Importeren</a:t>
+            </a:r>
+            <a:r>
+              <a:rPr lang="en-US" dirty="0"/>
+              <a:t> </a:t>
+            </a:r>
+            <a:r>
+              <a:rPr lang="en-US" dirty="0" err="1"/>
+              <a:t>nieuwe</a:t>
+            </a:r>
+            <a:r>
+              <a:rPr lang="en-US" dirty="0"/>
+              <a:t> </a:t>
+            </a:r>
+            <a:r>
+              <a:rPr lang="en-US" dirty="0" err="1"/>
+              <a:t>tileSet</a:t>
+            </a:r>
+            <a:endParaRPr lang="en-US" dirty="0"/>
+          </a:p>
+          <a:p>
+            <a:r>
+              <a:rPr lang="en-US" dirty="0" err="1"/>
+              <a:t>Opzetten</a:t>
+            </a:r>
+            <a:r>
+              <a:rPr lang="en-US" dirty="0"/>
+              <a:t> van </a:t>
+            </a:r>
+            <a:r>
+              <a:rPr lang="en-US" dirty="0" err="1"/>
+              <a:t>een</a:t>
+            </a:r>
+            <a:r>
+              <a:rPr lang="en-US" dirty="0"/>
+              <a:t> Tank-game</a:t>
+            </a:r>
+          </a:p>
+          <a:p>
+            <a:r>
+              <a:rPr lang="en-US" dirty="0" err="1"/>
+              <a:t>Herhaling</a:t>
+            </a:r>
+            <a:r>
+              <a:rPr lang="en-US" dirty="0"/>
+              <a:t> </a:t>
+            </a:r>
+            <a:r>
+              <a:rPr lang="en-US" dirty="0" err="1"/>
+              <a:t>Tilemap</a:t>
+            </a:r>
+            <a:endParaRPr lang="en-US" dirty="0"/>
+          </a:p>
+          <a:p>
+            <a:pPr lvl="1"/>
+            <a:r>
+              <a:rPr lang="en-US" dirty="0" err="1"/>
+              <a:t>Nieuwe</a:t>
+            </a:r>
+            <a:r>
+              <a:rPr lang="en-US" dirty="0"/>
+              <a:t> </a:t>
+            </a:r>
+            <a:r>
+              <a:rPr lang="en-US" dirty="0" err="1"/>
+              <a:t>tilePallette</a:t>
+            </a:r>
+            <a:r>
+              <a:rPr lang="en-US" dirty="0"/>
+              <a:t> </a:t>
+            </a:r>
+            <a:r>
+              <a:rPr lang="en-US" dirty="0" err="1"/>
+              <a:t>TankSheet</a:t>
+            </a:r>
+            <a:endParaRPr lang="en-US" dirty="0"/>
+          </a:p>
+          <a:p>
+            <a:pPr lvl="1"/>
+            <a:r>
+              <a:rPr lang="en-US" dirty="0" err="1"/>
+              <a:t>Nieuwe</a:t>
+            </a:r>
+            <a:r>
+              <a:rPr lang="en-US" dirty="0"/>
+              <a:t> </a:t>
+            </a:r>
+            <a:r>
+              <a:rPr lang="en-US" dirty="0" err="1"/>
+              <a:t>tileMap</a:t>
+            </a:r>
+            <a:r>
+              <a:rPr lang="en-US" dirty="0"/>
+              <a:t> </a:t>
+            </a:r>
+          </a:p>
+          <a:p>
+            <a:r>
+              <a:rPr lang="en-US" dirty="0" err="1"/>
+              <a:t>Herhaling</a:t>
+            </a:r>
+            <a:r>
+              <a:rPr lang="en-US" dirty="0"/>
+              <a:t> 2d-animatie</a:t>
+            </a:r>
+          </a:p>
+          <a:p>
+            <a:r>
+              <a:rPr lang="en-US" dirty="0" err="1"/>
+              <a:t>Herhaling</a:t>
+            </a:r>
+            <a:r>
+              <a:rPr lang="en-US" dirty="0"/>
+              <a:t> 2d movement</a:t>
+            </a:r>
+            <a:endParaRPr lang="nl-NL" dirty="0"/>
+          </a:p>
+        </p:txBody>
+      </p:sp>
+    </p:spTree>
+    <p:extLst>
+      <p:ext uri="{BB962C8B-B14F-4D97-AF65-F5344CB8AC3E}">
+        <p14:creationId xmlns:p14="http://schemas.microsoft.com/office/powerpoint/2010/main" val="2591817941"/>
+      </p:ext>
+    </p:extLst>
+  </p:cSld>
+  <p:clrMapOvr>
+    <a:masterClrMapping/>
+  </p:clrMapOvr>
+</p:sld>
+</file>
+
+<file path=ppt/slides/slide3.xml><?xml version="1.0" encoding="utf-8"?>
+<p:sld xmlns:a="http://schemas.openxmlformats.org/drawingml/2006/main" xmlns:r="http://schemas.openxmlformats.org/officeDocument/2006/relationships" xmlns:p="http://schemas.openxmlformats.org/presentationml/2006/main">
+  <p:cSld>
+    <p:spTree>
+      <p:nvGrpSpPr>
+        <p:cNvPr id="1" name=""/>
+        <p:cNvGrpSpPr/>
+        <p:nvPr/>
+      </p:nvGrpSpPr>
+      <p:grpSpPr>
+        <a:xfrm>
+          <a:off x="0" y="0"/>
+          <a:ext cx="0" cy="0"/>
+          <a:chOff x="0" y="0"/>
+          <a:chExt cx="0" cy="0"/>
+        </a:xfrm>
+      </p:grpSpPr>
+      <p:sp>
+        <p:nvSpPr>
+          <p:cNvPr id="2" name="Titel 1">
+            <a:extLst>
+              <a:ext uri="{FF2B5EF4-FFF2-40B4-BE49-F238E27FC236}">
                 <a16:creationId xmlns:a16="http://schemas.microsoft.com/office/drawing/2014/main" id="{E89CB73A-EC31-2D36-478F-772048539900}"/>
               </a:ext>
             </a:extLst>
@@ -3709,7 +3922,7 @@
         <p:spPr>
           <a:xfrm>
             <a:off x="3438452" y="5814215"/>
-            <a:ext cx="3085525" cy="369332"/>
+            <a:ext cx="4651594" cy="369332"/>
           </a:xfrm>
           <a:prstGeom prst="rect">
             <a:avLst/>
@@ -3724,14 +3937,22 @@
           <a:p>
             <a:r>
               <a:rPr lang="en-US" dirty="0"/>
-              <a:t>Wat is de </a:t>
+              <a:t>Hoe </a:t>
+            </a:r>
+            <a:r>
+              <a:rPr lang="en-US" dirty="0" err="1"/>
+              <a:t>groot</a:t>
+            </a:r>
+            <a:r>
+              <a:rPr lang="en-US" dirty="0"/>
+              <a:t> (in pixels) is de </a:t>
             </a:r>
             <a:r>
               <a:rPr lang="en-US" dirty="0" err="1"/>
               <a:t>afmeting</a:t>
             </a:r>
             <a:r>
-              <a:rPr lang="en-US"/>
+              <a:rPr lang="en-US" dirty="0"/>
               <a:t> van 1 Tile?</a:t>
             </a:r>
             <a:endParaRPr lang="nl-NL" dirty="0"/>
@@ -3742,6 +3963,916 @@
     <p:extLst>
       <p:ext uri="{BB962C8B-B14F-4D97-AF65-F5344CB8AC3E}">
         <p14:creationId xmlns:p14="http://schemas.microsoft.com/office/powerpoint/2010/main" val="2113109023"/>
+      </p:ext>
+    </p:extLst>
+  </p:cSld>
+  <p:clrMapOvr>
+    <a:masterClrMapping/>
+  </p:clrMapOvr>
+</p:sld>
+</file>
+
+<file path=ppt/slides/slide4.xml><?xml version="1.0" encoding="utf-8"?>
+<p:sld xmlns:a="http://schemas.openxmlformats.org/drawingml/2006/main" xmlns:r="http://schemas.openxmlformats.org/officeDocument/2006/relationships" xmlns:p="http://schemas.openxmlformats.org/presentationml/2006/main">
+  <p:cSld>
+    <p:spTree>
+      <p:nvGrpSpPr>
+        <p:cNvPr id="1" name=""/>
+        <p:cNvGrpSpPr/>
+        <p:nvPr/>
+      </p:nvGrpSpPr>
+      <p:grpSpPr>
+        <a:xfrm>
+          <a:off x="0" y="0"/>
+          <a:ext cx="0" cy="0"/>
+          <a:chOff x="0" y="0"/>
+          <a:chExt cx="0" cy="0"/>
+        </a:xfrm>
+      </p:grpSpPr>
+      <p:sp>
+        <p:nvSpPr>
+          <p:cNvPr id="2" name="Titel 1">
+            <a:extLst>
+              <a:ext uri="{FF2B5EF4-FFF2-40B4-BE49-F238E27FC236}">
+                <a16:creationId xmlns:a16="http://schemas.microsoft.com/office/drawing/2014/main" id="{82D4BE8C-A9EF-3C6D-9FF3-02CB2ED7481D}"/>
+              </a:ext>
+            </a:extLst>
+          </p:cNvPr>
+          <p:cNvSpPr>
+            <a:spLocks noGrp="1"/>
+          </p:cNvSpPr>
+          <p:nvPr>
+            <p:ph type="title"/>
+          </p:nvPr>
+        </p:nvSpPr>
+        <p:spPr/>
+        <p:txBody>
+          <a:bodyPr/>
+          <a:lstStyle/>
+          <a:p>
+            <a:r>
+              <a:rPr lang="en-US" dirty="0" err="1"/>
+              <a:t>Opzetten</a:t>
+            </a:r>
+            <a:r>
+              <a:rPr lang="en-US" dirty="0"/>
+              <a:t> basis</a:t>
+            </a:r>
+            <a:endParaRPr lang="nl-NL" dirty="0"/>
+          </a:p>
+        </p:txBody>
+      </p:sp>
+      <p:sp>
+        <p:nvSpPr>
+          <p:cNvPr id="3" name="Tijdelijke aanduiding voor inhoud 2">
+            <a:extLst>
+              <a:ext uri="{FF2B5EF4-FFF2-40B4-BE49-F238E27FC236}">
+                <a16:creationId xmlns:a16="http://schemas.microsoft.com/office/drawing/2014/main" id="{64F68BCB-A8AF-9CFC-6DF1-0DC3A06B8F88}"/>
+              </a:ext>
+            </a:extLst>
+          </p:cNvPr>
+          <p:cNvSpPr>
+            <a:spLocks noGrp="1"/>
+          </p:cNvSpPr>
+          <p:nvPr>
+            <p:ph idx="1"/>
+          </p:nvPr>
+        </p:nvSpPr>
+        <p:spPr/>
+        <p:txBody>
+          <a:bodyPr/>
+          <a:lstStyle/>
+          <a:p>
+            <a:r>
+              <a:rPr lang="en-US" dirty="0"/>
+              <a:t>Maak </a:t>
+            </a:r>
+            <a:r>
+              <a:rPr lang="en-US" dirty="0" err="1"/>
+              <a:t>een</a:t>
+            </a:r>
+            <a:r>
+              <a:rPr lang="en-US" dirty="0"/>
+              <a:t> </a:t>
+            </a:r>
+            <a:r>
+              <a:rPr lang="en-US" dirty="0" err="1"/>
+              <a:t>nieuwe</a:t>
+            </a:r>
+            <a:r>
+              <a:rPr lang="en-US" dirty="0"/>
+              <a:t> Scene: Les4</a:t>
+            </a:r>
+          </a:p>
+          <a:p>
+            <a:r>
+              <a:rPr lang="en-US" dirty="0"/>
+              <a:t>Maak </a:t>
+            </a:r>
+            <a:r>
+              <a:rPr lang="en-US" dirty="0" err="1"/>
+              <a:t>daarin</a:t>
+            </a:r>
+            <a:r>
+              <a:rPr lang="en-US" dirty="0"/>
+              <a:t> </a:t>
+            </a:r>
+            <a:r>
+              <a:rPr lang="en-US" dirty="0" err="1"/>
+              <a:t>een</a:t>
+            </a:r>
+            <a:r>
+              <a:rPr lang="en-US" dirty="0"/>
+              <a:t> </a:t>
+            </a:r>
+            <a:r>
+              <a:rPr lang="en-US" dirty="0" err="1"/>
+              <a:t>nieuwe</a:t>
+            </a:r>
+            <a:r>
+              <a:rPr lang="en-US" dirty="0"/>
+              <a:t> </a:t>
+            </a:r>
+            <a:r>
+              <a:rPr lang="en-US" dirty="0" err="1"/>
+              <a:t>Tilemap</a:t>
+            </a:r>
+            <a:r>
+              <a:rPr lang="en-US" dirty="0"/>
+              <a:t> “Ground”</a:t>
+            </a:r>
+          </a:p>
+          <a:p>
+            <a:r>
+              <a:rPr lang="en-US" dirty="0" err="1"/>
+              <a:t>Vul</a:t>
+            </a:r>
+            <a:r>
+              <a:rPr lang="en-US" dirty="0"/>
+              <a:t> de </a:t>
+            </a:r>
+            <a:r>
+              <a:rPr lang="en-US" dirty="0" err="1"/>
+              <a:t>Tilemap</a:t>
+            </a:r>
+            <a:r>
+              <a:rPr lang="en-US" dirty="0"/>
+              <a:t> “Ground” met </a:t>
+            </a:r>
+            <a:br>
+              <a:rPr lang="en-US" dirty="0"/>
+            </a:br>
+            <a:endParaRPr lang="en-US" dirty="0"/>
+          </a:p>
+          <a:p>
+            <a:endParaRPr lang="nl-NL" dirty="0"/>
+          </a:p>
+        </p:txBody>
+      </p:sp>
+      <p:pic>
+        <p:nvPicPr>
+          <p:cNvPr id="5" name="Afbeelding 4">
+            <a:extLst>
+              <a:ext uri="{FF2B5EF4-FFF2-40B4-BE49-F238E27FC236}">
+                <a16:creationId xmlns:a16="http://schemas.microsoft.com/office/drawing/2014/main" id="{96D1C56A-AF81-87AD-E83E-DFBD1E1544EE}"/>
+              </a:ext>
+            </a:extLst>
+          </p:cNvPr>
+          <p:cNvPicPr>
+            <a:picLocks noChangeAspect="1"/>
+          </p:cNvPicPr>
+          <p:nvPr/>
+        </p:nvPicPr>
+        <p:blipFill>
+          <a:blip r:embed="rId2"/>
+          <a:stretch>
+            <a:fillRect/>
+          </a:stretch>
+        </p:blipFill>
+        <p:spPr>
+          <a:xfrm>
+            <a:off x="5958787" y="2803473"/>
+            <a:ext cx="762106" cy="743054"/>
+          </a:xfrm>
+          <a:prstGeom prst="rect">
+            <a:avLst/>
+          </a:prstGeom>
+        </p:spPr>
+      </p:pic>
+    </p:spTree>
+    <p:extLst>
+      <p:ext uri="{BB962C8B-B14F-4D97-AF65-F5344CB8AC3E}">
+        <p14:creationId xmlns:p14="http://schemas.microsoft.com/office/powerpoint/2010/main" val="2162301902"/>
+      </p:ext>
+    </p:extLst>
+  </p:cSld>
+  <p:clrMapOvr>
+    <a:masterClrMapping/>
+  </p:clrMapOvr>
+</p:sld>
+</file>
+
+<file path=ppt/slides/slide5.xml><?xml version="1.0" encoding="utf-8"?>
+<p:sld xmlns:a="http://schemas.openxmlformats.org/drawingml/2006/main" xmlns:r="http://schemas.openxmlformats.org/officeDocument/2006/relationships" xmlns:p="http://schemas.openxmlformats.org/presentationml/2006/main">
+  <p:cSld>
+    <p:spTree>
+      <p:nvGrpSpPr>
+        <p:cNvPr id="1" name=""/>
+        <p:cNvGrpSpPr/>
+        <p:nvPr/>
+      </p:nvGrpSpPr>
+      <p:grpSpPr>
+        <a:xfrm>
+          <a:off x="0" y="0"/>
+          <a:ext cx="0" cy="0"/>
+          <a:chOff x="0" y="0"/>
+          <a:chExt cx="0" cy="0"/>
+        </a:xfrm>
+      </p:grpSpPr>
+      <p:sp>
+        <p:nvSpPr>
+          <p:cNvPr id="2" name="Titel 1">
+            <a:extLst>
+              <a:ext uri="{FF2B5EF4-FFF2-40B4-BE49-F238E27FC236}">
+                <a16:creationId xmlns:a16="http://schemas.microsoft.com/office/drawing/2014/main" id="{2536C2DE-00F7-8373-42BE-1377BBABC613}"/>
+              </a:ext>
+            </a:extLst>
+          </p:cNvPr>
+          <p:cNvSpPr>
+            <a:spLocks noGrp="1"/>
+          </p:cNvSpPr>
+          <p:nvPr>
+            <p:ph type="title"/>
+          </p:nvPr>
+        </p:nvSpPr>
+        <p:spPr/>
+        <p:txBody>
+          <a:bodyPr/>
+          <a:lstStyle/>
+          <a:p>
+            <a:r>
+              <a:rPr lang="en-US" dirty="0" err="1"/>
+              <a:t>Opzetten</a:t>
+            </a:r>
+            <a:r>
+              <a:rPr lang="en-US" dirty="0"/>
+              <a:t> Player</a:t>
+            </a:r>
+            <a:endParaRPr lang="nl-NL" dirty="0"/>
+          </a:p>
+        </p:txBody>
+      </p:sp>
+      <p:sp>
+        <p:nvSpPr>
+          <p:cNvPr id="3" name="Tijdelijke aanduiding voor inhoud 2">
+            <a:extLst>
+              <a:ext uri="{FF2B5EF4-FFF2-40B4-BE49-F238E27FC236}">
+                <a16:creationId xmlns:a16="http://schemas.microsoft.com/office/drawing/2014/main" id="{995078E4-02AE-316A-0C3A-4ACCEDB90E1B}"/>
+              </a:ext>
+            </a:extLst>
+          </p:cNvPr>
+          <p:cNvSpPr>
+            <a:spLocks noGrp="1"/>
+          </p:cNvSpPr>
+          <p:nvPr>
+            <p:ph idx="1"/>
+          </p:nvPr>
+        </p:nvSpPr>
+        <p:spPr/>
+        <p:txBody>
+          <a:bodyPr/>
+          <a:lstStyle/>
+          <a:p>
+            <a:r>
+              <a:rPr lang="en-US" dirty="0"/>
+              <a:t> Maak </a:t>
+            </a:r>
+            <a:r>
+              <a:rPr lang="en-US" dirty="0" err="1"/>
+              <a:t>een</a:t>
+            </a:r>
+            <a:r>
+              <a:rPr lang="en-US" dirty="0"/>
+              <a:t> </a:t>
+            </a:r>
+            <a:r>
+              <a:rPr lang="en-US" dirty="0" err="1"/>
+              <a:t>leeg</a:t>
+            </a:r>
+            <a:r>
+              <a:rPr lang="en-US" dirty="0"/>
+              <a:t> </a:t>
+            </a:r>
+            <a:r>
+              <a:rPr lang="en-US" dirty="0" err="1"/>
+              <a:t>GameObject</a:t>
+            </a:r>
+            <a:r>
+              <a:rPr lang="en-US" dirty="0"/>
+              <a:t> “Player”</a:t>
+            </a:r>
+          </a:p>
+          <a:p>
+            <a:r>
+              <a:rPr lang="en-US" dirty="0"/>
+              <a:t>Maak in “Player” </a:t>
+            </a:r>
+            <a:r>
+              <a:rPr lang="en-US" dirty="0" err="1"/>
+              <a:t>een</a:t>
+            </a:r>
+            <a:r>
+              <a:rPr lang="en-US" dirty="0"/>
+              <a:t> </a:t>
+            </a:r>
+            <a:r>
+              <a:rPr lang="en-US" dirty="0" err="1"/>
+              <a:t>childObject</a:t>
+            </a:r>
+            <a:r>
+              <a:rPr lang="en-US" dirty="0"/>
+              <a:t> met </a:t>
+            </a:r>
+            <a:r>
+              <a:rPr lang="en-US" dirty="0" err="1"/>
+              <a:t>als</a:t>
+            </a:r>
+            <a:r>
+              <a:rPr lang="en-US" dirty="0"/>
+              <a:t> naam “</a:t>
+            </a:r>
+            <a:r>
+              <a:rPr lang="en-US" dirty="0" err="1"/>
+              <a:t>TankAnim</a:t>
+            </a:r>
+            <a:r>
+              <a:rPr lang="en-US" dirty="0"/>
+              <a:t>”</a:t>
+            </a:r>
+          </a:p>
+          <a:p>
+            <a:r>
+              <a:rPr lang="en-US" dirty="0"/>
+              <a:t>Zet de </a:t>
+            </a:r>
+            <a:r>
+              <a:rPr lang="en-US" dirty="0" err="1"/>
+              <a:t>animatie</a:t>
+            </a:r>
+            <a:r>
+              <a:rPr lang="en-US" dirty="0"/>
+              <a:t> </a:t>
+            </a:r>
+            <a:r>
+              <a:rPr lang="en-US" dirty="0" err="1"/>
+              <a:t>voor</a:t>
+            </a:r>
+            <a:r>
+              <a:rPr lang="en-US" dirty="0"/>
+              <a:t> de Tank van de player op</a:t>
+            </a:r>
+          </a:p>
+          <a:p>
+            <a:endParaRPr lang="nl-NL" dirty="0"/>
+          </a:p>
+        </p:txBody>
+      </p:sp>
+      <p:grpSp>
+        <p:nvGrpSpPr>
+          <p:cNvPr id="8" name="Groep 7">
+            <a:extLst>
+              <a:ext uri="{FF2B5EF4-FFF2-40B4-BE49-F238E27FC236}">
+                <a16:creationId xmlns:a16="http://schemas.microsoft.com/office/drawing/2014/main" id="{86AF503C-E180-D133-A123-9CC3044E5903}"/>
+              </a:ext>
+            </a:extLst>
+          </p:cNvPr>
+          <p:cNvGrpSpPr/>
+          <p:nvPr/>
+        </p:nvGrpSpPr>
+        <p:grpSpPr>
+          <a:xfrm>
+            <a:off x="1233853" y="3429000"/>
+            <a:ext cx="5611008" cy="1505160"/>
+            <a:chOff x="1136576" y="2849140"/>
+            <a:chExt cx="5611008" cy="1505160"/>
+          </a:xfrm>
+        </p:grpSpPr>
+        <p:pic>
+          <p:nvPicPr>
+            <p:cNvPr id="5" name="Afbeelding 4">
+              <a:extLst>
+                <a:ext uri="{FF2B5EF4-FFF2-40B4-BE49-F238E27FC236}">
+                  <a16:creationId xmlns:a16="http://schemas.microsoft.com/office/drawing/2014/main" id="{20D80739-05C9-A678-64DD-56863E166A00}"/>
+                </a:ext>
+              </a:extLst>
+            </p:cNvPr>
+            <p:cNvPicPr>
+              <a:picLocks noChangeAspect="1"/>
+            </p:cNvPicPr>
+            <p:nvPr/>
+          </p:nvPicPr>
+          <p:blipFill>
+            <a:blip r:embed="rId2"/>
+            <a:stretch>
+              <a:fillRect/>
+            </a:stretch>
+          </p:blipFill>
+          <p:spPr>
+            <a:xfrm>
+              <a:off x="1136576" y="2849140"/>
+              <a:ext cx="5611008" cy="1505160"/>
+            </a:xfrm>
+            <a:prstGeom prst="rect">
+              <a:avLst/>
+            </a:prstGeom>
+          </p:spPr>
+        </p:pic>
+        <p:sp>
+          <p:nvSpPr>
+            <p:cNvPr id="6" name="Rechthoek 5">
+              <a:extLst>
+                <a:ext uri="{FF2B5EF4-FFF2-40B4-BE49-F238E27FC236}">
+                  <a16:creationId xmlns:a16="http://schemas.microsoft.com/office/drawing/2014/main" id="{2C93B4D6-7009-80BF-5AE6-7D4E19B9ADC3}"/>
+                </a:ext>
+              </a:extLst>
+            </p:cNvPr>
+            <p:cNvSpPr/>
+            <p:nvPr/>
+          </p:nvSpPr>
+          <p:spPr>
+            <a:xfrm>
+              <a:off x="1930400" y="3637280"/>
+              <a:ext cx="4795520" cy="690880"/>
+            </a:xfrm>
+            <a:prstGeom prst="rect">
+              <a:avLst/>
+            </a:prstGeom>
+            <a:solidFill>
+              <a:schemeClr val="bg1"/>
+            </a:solidFill>
+            <a:ln>
+              <a:solidFill>
+                <a:schemeClr val="bg1"/>
+              </a:solidFill>
+            </a:ln>
+          </p:spPr>
+          <p:style>
+            <a:lnRef idx="2">
+              <a:schemeClr val="accent1">
+                <a:shade val="15000"/>
+              </a:schemeClr>
+            </a:lnRef>
+            <a:fillRef idx="1">
+              <a:schemeClr val="accent1"/>
+            </a:fillRef>
+            <a:effectRef idx="0">
+              <a:schemeClr val="accent1"/>
+            </a:effectRef>
+            <a:fontRef idx="minor">
+              <a:schemeClr val="lt1"/>
+            </a:fontRef>
+          </p:style>
+          <p:txBody>
+            <a:bodyPr rtlCol="0" anchor="ctr"/>
+            <a:lstStyle/>
+            <a:p>
+              <a:pPr algn="ctr"/>
+              <a:endParaRPr lang="nl-NL"/>
+            </a:p>
+          </p:txBody>
+        </p:sp>
+        <p:sp>
+          <p:nvSpPr>
+            <p:cNvPr id="7" name="Rechthoek 6">
+              <a:extLst>
+                <a:ext uri="{FF2B5EF4-FFF2-40B4-BE49-F238E27FC236}">
+                  <a16:creationId xmlns:a16="http://schemas.microsoft.com/office/drawing/2014/main" id="{EB299D95-4D6D-E7C0-93AE-17CFB0B2844E}"/>
+                </a:ext>
+              </a:extLst>
+            </p:cNvPr>
+            <p:cNvSpPr/>
+            <p:nvPr/>
+          </p:nvSpPr>
+          <p:spPr>
+            <a:xfrm>
+              <a:off x="1136576" y="2910840"/>
+              <a:ext cx="692224" cy="690880"/>
+            </a:xfrm>
+            <a:prstGeom prst="rect">
+              <a:avLst/>
+            </a:prstGeom>
+            <a:solidFill>
+              <a:schemeClr val="bg1"/>
+            </a:solidFill>
+            <a:ln>
+              <a:solidFill>
+                <a:schemeClr val="bg1"/>
+              </a:solidFill>
+            </a:ln>
+          </p:spPr>
+          <p:style>
+            <a:lnRef idx="2">
+              <a:schemeClr val="accent1">
+                <a:shade val="15000"/>
+              </a:schemeClr>
+            </a:lnRef>
+            <a:fillRef idx="1">
+              <a:schemeClr val="accent1"/>
+            </a:fillRef>
+            <a:effectRef idx="0">
+              <a:schemeClr val="accent1"/>
+            </a:effectRef>
+            <a:fontRef idx="minor">
+              <a:schemeClr val="lt1"/>
+            </a:fontRef>
+          </p:style>
+          <p:txBody>
+            <a:bodyPr rtlCol="0" anchor="ctr"/>
+            <a:lstStyle/>
+            <a:p>
+              <a:pPr algn="ctr"/>
+              <a:endParaRPr lang="nl-NL"/>
+            </a:p>
+          </p:txBody>
+        </p:sp>
+      </p:grpSp>
+      <p:sp>
+        <p:nvSpPr>
+          <p:cNvPr id="9" name="Tijdelijke aanduiding voor inhoud 2">
+            <a:extLst>
+              <a:ext uri="{FF2B5EF4-FFF2-40B4-BE49-F238E27FC236}">
+                <a16:creationId xmlns:a16="http://schemas.microsoft.com/office/drawing/2014/main" id="{6AA52A7A-6B75-D0B9-07E5-34F628E2A388}"/>
+              </a:ext>
+            </a:extLst>
+          </p:cNvPr>
+          <p:cNvSpPr txBox="1">
+            <a:spLocks/>
+          </p:cNvSpPr>
+          <p:nvPr/>
+        </p:nvSpPr>
+        <p:spPr>
+          <a:xfrm>
+            <a:off x="1013298" y="1543522"/>
+            <a:ext cx="10515600" cy="4351338"/>
+          </a:xfrm>
+          <a:prstGeom prst="rect">
+            <a:avLst/>
+          </a:prstGeom>
+        </p:spPr>
+        <p:txBody>
+          <a:bodyPr vert="horz" lIns="91440" tIns="45720" rIns="91440" bIns="45720" rtlCol="0">
+            <a:normAutofit/>
+          </a:bodyPr>
+          <a:lstStyle>
+            <a:lvl1pPr marL="228600" indent="-228600" algn="l" defTabSz="914400" rtl="0" eaLnBrk="1" latinLnBrk="0" hangingPunct="1">
+              <a:lnSpc>
+                <a:spcPct val="90000"/>
+              </a:lnSpc>
+              <a:spcBef>
+                <a:spcPts val="1000"/>
+              </a:spcBef>
+              <a:buFont typeface="Arial" panose="020B0604020202020204" pitchFamily="34" charset="0"/>
+              <a:buChar char="•"/>
+              <a:defRPr sz="2800" kern="1200">
+                <a:solidFill>
+                  <a:schemeClr val="tx1"/>
+                </a:solidFill>
+                <a:latin typeface="+mn-lt"/>
+                <a:ea typeface="+mn-ea"/>
+                <a:cs typeface="+mn-cs"/>
+              </a:defRPr>
+            </a:lvl1pPr>
+            <a:lvl2pPr marL="685800" indent="-228600" algn="l" defTabSz="914400" rtl="0" eaLnBrk="1" latinLnBrk="0" hangingPunct="1">
+              <a:lnSpc>
+                <a:spcPct val="90000"/>
+              </a:lnSpc>
+              <a:spcBef>
+                <a:spcPts val="500"/>
+              </a:spcBef>
+              <a:buFont typeface="Arial" panose="020B0604020202020204" pitchFamily="34" charset="0"/>
+              <a:buChar char="•"/>
+              <a:defRPr sz="2400" kern="1200">
+                <a:solidFill>
+                  <a:schemeClr val="tx1"/>
+                </a:solidFill>
+                <a:latin typeface="+mn-lt"/>
+                <a:ea typeface="+mn-ea"/>
+                <a:cs typeface="+mn-cs"/>
+              </a:defRPr>
+            </a:lvl2pPr>
+            <a:lvl3pPr marL="1143000" indent="-228600" algn="l" defTabSz="914400" rtl="0" eaLnBrk="1" latinLnBrk="0" hangingPunct="1">
+              <a:lnSpc>
+                <a:spcPct val="90000"/>
+              </a:lnSpc>
+              <a:spcBef>
+                <a:spcPts val="500"/>
+              </a:spcBef>
+              <a:buFont typeface="Arial" panose="020B0604020202020204" pitchFamily="34" charset="0"/>
+              <a:buChar char="•"/>
+              <a:defRPr sz="2000" kern="1200">
+                <a:solidFill>
+                  <a:schemeClr val="tx1"/>
+                </a:solidFill>
+                <a:latin typeface="+mn-lt"/>
+                <a:ea typeface="+mn-ea"/>
+                <a:cs typeface="+mn-cs"/>
+              </a:defRPr>
+            </a:lvl3pPr>
+            <a:lvl4pPr marL="1600200" indent="-228600" algn="l" defTabSz="914400" rtl="0" eaLnBrk="1" latinLnBrk="0" hangingPunct="1">
+              <a:lnSpc>
+                <a:spcPct val="90000"/>
+              </a:lnSpc>
+              <a:spcBef>
+                <a:spcPts val="500"/>
+              </a:spcBef>
+              <a:buFont typeface="Arial" panose="020B0604020202020204" pitchFamily="34" charset="0"/>
+              <a:buChar char="•"/>
+              <a:defRPr sz="1800" kern="1200">
+                <a:solidFill>
+                  <a:schemeClr val="tx1"/>
+                </a:solidFill>
+                <a:latin typeface="+mn-lt"/>
+                <a:ea typeface="+mn-ea"/>
+                <a:cs typeface="+mn-cs"/>
+              </a:defRPr>
+            </a:lvl4pPr>
+            <a:lvl5pPr marL="2057400" indent="-228600" algn="l" defTabSz="914400" rtl="0" eaLnBrk="1" latinLnBrk="0" hangingPunct="1">
+              <a:lnSpc>
+                <a:spcPct val="90000"/>
+              </a:lnSpc>
+              <a:spcBef>
+                <a:spcPts val="500"/>
+              </a:spcBef>
+              <a:buFont typeface="Arial" panose="020B0604020202020204" pitchFamily="34" charset="0"/>
+              <a:buChar char="•"/>
+              <a:defRPr sz="1800" kern="1200">
+                <a:solidFill>
+                  <a:schemeClr val="tx1"/>
+                </a:solidFill>
+                <a:latin typeface="+mn-lt"/>
+                <a:ea typeface="+mn-ea"/>
+                <a:cs typeface="+mn-cs"/>
+              </a:defRPr>
+            </a:lvl5pPr>
+            <a:lvl6pPr marL="2514600" indent="-228600" algn="l" defTabSz="914400" rtl="0" eaLnBrk="1" latinLnBrk="0" hangingPunct="1">
+              <a:lnSpc>
+                <a:spcPct val="90000"/>
+              </a:lnSpc>
+              <a:spcBef>
+                <a:spcPts val="500"/>
+              </a:spcBef>
+              <a:buFont typeface="Arial" panose="020B0604020202020204" pitchFamily="34" charset="0"/>
+              <a:buChar char="•"/>
+              <a:defRPr sz="1800" kern="1200">
+                <a:solidFill>
+                  <a:schemeClr val="tx1"/>
+                </a:solidFill>
+                <a:latin typeface="+mn-lt"/>
+                <a:ea typeface="+mn-ea"/>
+                <a:cs typeface="+mn-cs"/>
+              </a:defRPr>
+            </a:lvl6pPr>
+            <a:lvl7pPr marL="2971800" indent="-228600" algn="l" defTabSz="914400" rtl="0" eaLnBrk="1" latinLnBrk="0" hangingPunct="1">
+              <a:lnSpc>
+                <a:spcPct val="90000"/>
+              </a:lnSpc>
+              <a:spcBef>
+                <a:spcPts val="500"/>
+              </a:spcBef>
+              <a:buFont typeface="Arial" panose="020B0604020202020204" pitchFamily="34" charset="0"/>
+              <a:buChar char="•"/>
+              <a:defRPr sz="1800" kern="1200">
+                <a:solidFill>
+                  <a:schemeClr val="tx1"/>
+                </a:solidFill>
+                <a:latin typeface="+mn-lt"/>
+                <a:ea typeface="+mn-ea"/>
+                <a:cs typeface="+mn-cs"/>
+              </a:defRPr>
+            </a:lvl7pPr>
+            <a:lvl8pPr marL="3429000" indent="-228600" algn="l" defTabSz="914400" rtl="0" eaLnBrk="1" latinLnBrk="0" hangingPunct="1">
+              <a:lnSpc>
+                <a:spcPct val="90000"/>
+              </a:lnSpc>
+              <a:spcBef>
+                <a:spcPts val="500"/>
+              </a:spcBef>
+              <a:buFont typeface="Arial" panose="020B0604020202020204" pitchFamily="34" charset="0"/>
+              <a:buChar char="•"/>
+              <a:defRPr sz="1800" kern="1200">
+                <a:solidFill>
+                  <a:schemeClr val="tx1"/>
+                </a:solidFill>
+                <a:latin typeface="+mn-lt"/>
+                <a:ea typeface="+mn-ea"/>
+                <a:cs typeface="+mn-cs"/>
+              </a:defRPr>
+            </a:lvl8pPr>
+            <a:lvl9pPr marL="3886200" indent="-228600" algn="l" defTabSz="914400" rtl="0" eaLnBrk="1" latinLnBrk="0" hangingPunct="1">
+              <a:lnSpc>
+                <a:spcPct val="90000"/>
+              </a:lnSpc>
+              <a:spcBef>
+                <a:spcPts val="500"/>
+              </a:spcBef>
+              <a:buFont typeface="Arial" panose="020B0604020202020204" pitchFamily="34" charset="0"/>
+              <a:buChar char="•"/>
+              <a:defRPr sz="1800" kern="1200">
+                <a:solidFill>
+                  <a:schemeClr val="tx1"/>
+                </a:solidFill>
+                <a:latin typeface="+mn-lt"/>
+                <a:ea typeface="+mn-ea"/>
+                <a:cs typeface="+mn-cs"/>
+              </a:defRPr>
+            </a:lvl9pPr>
+          </a:lstStyle>
+          <a:p>
+            <a:r>
+              <a:rPr lang="en-US"/>
+              <a:t> Maak een leeg GameObject “Player”</a:t>
+            </a:r>
+          </a:p>
+          <a:p>
+            <a:r>
+              <a:rPr lang="en-US"/>
+              <a:t>Maak in “Player” een childObject met als naam “TankAnim”</a:t>
+            </a:r>
+          </a:p>
+          <a:p>
+            <a:r>
+              <a:rPr lang="en-US"/>
+              <a:t>Zet de animatie voor de Tank van de player op</a:t>
+            </a:r>
+          </a:p>
+          <a:p>
+            <a:endParaRPr lang="nl-NL" dirty="0"/>
+          </a:p>
+        </p:txBody>
+      </p:sp>
+      <p:grpSp>
+        <p:nvGrpSpPr>
+          <p:cNvPr id="10" name="Groep 9">
+            <a:extLst>
+              <a:ext uri="{FF2B5EF4-FFF2-40B4-BE49-F238E27FC236}">
+                <a16:creationId xmlns:a16="http://schemas.microsoft.com/office/drawing/2014/main" id="{E6A4793E-4F98-E5B7-02C0-01118B57D235}"/>
+              </a:ext>
+            </a:extLst>
+          </p:cNvPr>
+          <p:cNvGrpSpPr/>
+          <p:nvPr/>
+        </p:nvGrpSpPr>
+        <p:grpSpPr>
+          <a:xfrm>
+            <a:off x="1408951" y="3146897"/>
+            <a:ext cx="5611008" cy="1505160"/>
+            <a:chOff x="1136576" y="2849140"/>
+            <a:chExt cx="5611008" cy="1505160"/>
+          </a:xfrm>
+        </p:grpSpPr>
+        <p:pic>
+          <p:nvPicPr>
+            <p:cNvPr id="11" name="Afbeelding 10">
+              <a:extLst>
+                <a:ext uri="{FF2B5EF4-FFF2-40B4-BE49-F238E27FC236}">
+                  <a16:creationId xmlns:a16="http://schemas.microsoft.com/office/drawing/2014/main" id="{06E83C7E-6C0B-137E-82EC-F2FC5D24AF38}"/>
+                </a:ext>
+              </a:extLst>
+            </p:cNvPr>
+            <p:cNvPicPr>
+              <a:picLocks noChangeAspect="1"/>
+            </p:cNvPicPr>
+            <p:nvPr/>
+          </p:nvPicPr>
+          <p:blipFill>
+            <a:blip r:embed="rId2"/>
+            <a:stretch>
+              <a:fillRect/>
+            </a:stretch>
+          </p:blipFill>
+          <p:spPr>
+            <a:xfrm>
+              <a:off x="1136576" y="2849140"/>
+              <a:ext cx="5611008" cy="1505160"/>
+            </a:xfrm>
+            <a:prstGeom prst="rect">
+              <a:avLst/>
+            </a:prstGeom>
+          </p:spPr>
+        </p:pic>
+        <p:sp>
+          <p:nvSpPr>
+            <p:cNvPr id="12" name="Rechthoek 11">
+              <a:extLst>
+                <a:ext uri="{FF2B5EF4-FFF2-40B4-BE49-F238E27FC236}">
+                  <a16:creationId xmlns:a16="http://schemas.microsoft.com/office/drawing/2014/main" id="{BCD6A3B1-6A60-FEC6-A1FF-81C73FE76AB0}"/>
+                </a:ext>
+              </a:extLst>
+            </p:cNvPr>
+            <p:cNvSpPr/>
+            <p:nvPr/>
+          </p:nvSpPr>
+          <p:spPr>
+            <a:xfrm>
+              <a:off x="1930400" y="3637280"/>
+              <a:ext cx="4795520" cy="690880"/>
+            </a:xfrm>
+            <a:prstGeom prst="rect">
+              <a:avLst/>
+            </a:prstGeom>
+            <a:solidFill>
+              <a:schemeClr val="bg1"/>
+            </a:solidFill>
+            <a:ln>
+              <a:solidFill>
+                <a:schemeClr val="bg1"/>
+              </a:solidFill>
+            </a:ln>
+          </p:spPr>
+          <p:style>
+            <a:lnRef idx="2">
+              <a:schemeClr val="accent1">
+                <a:shade val="15000"/>
+              </a:schemeClr>
+            </a:lnRef>
+            <a:fillRef idx="1">
+              <a:schemeClr val="accent1"/>
+            </a:fillRef>
+            <a:effectRef idx="0">
+              <a:schemeClr val="accent1"/>
+            </a:effectRef>
+            <a:fontRef idx="minor">
+              <a:schemeClr val="lt1"/>
+            </a:fontRef>
+          </p:style>
+          <p:txBody>
+            <a:bodyPr rtlCol="0" anchor="ctr"/>
+            <a:lstStyle/>
+            <a:p>
+              <a:pPr algn="ctr"/>
+              <a:endParaRPr lang="nl-NL"/>
+            </a:p>
+          </p:txBody>
+        </p:sp>
+        <p:sp>
+          <p:nvSpPr>
+            <p:cNvPr id="13" name="Rechthoek 12">
+              <a:extLst>
+                <a:ext uri="{FF2B5EF4-FFF2-40B4-BE49-F238E27FC236}">
+                  <a16:creationId xmlns:a16="http://schemas.microsoft.com/office/drawing/2014/main" id="{BE0E3F16-7F4E-90DC-7F01-C3EF39FCB17D}"/>
+                </a:ext>
+              </a:extLst>
+            </p:cNvPr>
+            <p:cNvSpPr/>
+            <p:nvPr/>
+          </p:nvSpPr>
+          <p:spPr>
+            <a:xfrm>
+              <a:off x="1136576" y="2910840"/>
+              <a:ext cx="692224" cy="690880"/>
+            </a:xfrm>
+            <a:prstGeom prst="rect">
+              <a:avLst/>
+            </a:prstGeom>
+            <a:solidFill>
+              <a:schemeClr val="bg1"/>
+            </a:solidFill>
+            <a:ln>
+              <a:solidFill>
+                <a:schemeClr val="bg1"/>
+              </a:solidFill>
+            </a:ln>
+          </p:spPr>
+          <p:style>
+            <a:lnRef idx="2">
+              <a:schemeClr val="accent1">
+                <a:shade val="15000"/>
+              </a:schemeClr>
+            </a:lnRef>
+            <a:fillRef idx="1">
+              <a:schemeClr val="accent1"/>
+            </a:fillRef>
+            <a:effectRef idx="0">
+              <a:schemeClr val="accent1"/>
+            </a:effectRef>
+            <a:fontRef idx="minor">
+              <a:schemeClr val="lt1"/>
+            </a:fontRef>
+          </p:style>
+          <p:txBody>
+            <a:bodyPr rtlCol="0" anchor="ctr"/>
+            <a:lstStyle/>
+            <a:p>
+              <a:pPr algn="ctr"/>
+              <a:endParaRPr lang="nl-NL"/>
+            </a:p>
+          </p:txBody>
+        </p:sp>
+      </p:grpSp>
+    </p:spTree>
+    <p:extLst>
+      <p:ext uri="{BB962C8B-B14F-4D97-AF65-F5344CB8AC3E}">
+        <p14:creationId xmlns:p14="http://schemas.microsoft.com/office/powerpoint/2010/main" val="2334937128"/>
       </p:ext>
     </p:extLst>
   </p:cSld>

--- a/M4/GDV_2D_Gym/les4/m4-gym2d-les4.pptx
+++ b/M4/GDV_2D_Gym/les4/m4-gym2d-les4.pptx
@@ -263,7 +263,7 @@
           <a:p>
             <a:fld id="{289F147A-C75C-4EE1-85A0-F1BDEA974B7A}" type="datetimeFigureOut">
               <a:rPr lang="nl-NL" smtClean="0"/>
-              <a:t>27-5-2026</a:t>
+              <a:t>28-5-2026</a:t>
             </a:fld>
             <a:endParaRPr lang="nl-NL"/>
           </a:p>
@@ -461,7 +461,7 @@
           <a:p>
             <a:fld id="{289F147A-C75C-4EE1-85A0-F1BDEA974B7A}" type="datetimeFigureOut">
               <a:rPr lang="nl-NL" smtClean="0"/>
-              <a:t>27-5-2026</a:t>
+              <a:t>28-5-2026</a:t>
             </a:fld>
             <a:endParaRPr lang="nl-NL"/>
           </a:p>
@@ -669,7 +669,7 @@
           <a:p>
             <a:fld id="{289F147A-C75C-4EE1-85A0-F1BDEA974B7A}" type="datetimeFigureOut">
               <a:rPr lang="nl-NL" smtClean="0"/>
-              <a:t>27-5-2026</a:t>
+              <a:t>28-5-2026</a:t>
             </a:fld>
             <a:endParaRPr lang="nl-NL"/>
           </a:p>
@@ -867,7 +867,7 @@
           <a:p>
             <a:fld id="{289F147A-C75C-4EE1-85A0-F1BDEA974B7A}" type="datetimeFigureOut">
               <a:rPr lang="nl-NL" smtClean="0"/>
-              <a:t>27-5-2026</a:t>
+              <a:t>28-5-2026</a:t>
             </a:fld>
             <a:endParaRPr lang="nl-NL"/>
           </a:p>
@@ -1142,7 +1142,7 @@
           <a:p>
             <a:fld id="{289F147A-C75C-4EE1-85A0-F1BDEA974B7A}" type="datetimeFigureOut">
               <a:rPr lang="nl-NL" smtClean="0"/>
-              <a:t>27-5-2026</a:t>
+              <a:t>28-5-2026</a:t>
             </a:fld>
             <a:endParaRPr lang="nl-NL"/>
           </a:p>
@@ -1407,7 +1407,7 @@
           <a:p>
             <a:fld id="{289F147A-C75C-4EE1-85A0-F1BDEA974B7A}" type="datetimeFigureOut">
               <a:rPr lang="nl-NL" smtClean="0"/>
-              <a:t>27-5-2026</a:t>
+              <a:t>28-5-2026</a:t>
             </a:fld>
             <a:endParaRPr lang="nl-NL"/>
           </a:p>
@@ -1819,7 +1819,7 @@
           <a:p>
             <a:fld id="{289F147A-C75C-4EE1-85A0-F1BDEA974B7A}" type="datetimeFigureOut">
               <a:rPr lang="nl-NL" smtClean="0"/>
-              <a:t>27-5-2026</a:t>
+              <a:t>28-5-2026</a:t>
             </a:fld>
             <a:endParaRPr lang="nl-NL"/>
           </a:p>
@@ -1960,7 +1960,7 @@
           <a:p>
             <a:fld id="{289F147A-C75C-4EE1-85A0-F1BDEA974B7A}" type="datetimeFigureOut">
               <a:rPr lang="nl-NL" smtClean="0"/>
-              <a:t>27-5-2026</a:t>
+              <a:t>28-5-2026</a:t>
             </a:fld>
             <a:endParaRPr lang="nl-NL"/>
           </a:p>
@@ -2073,7 +2073,7 @@
           <a:p>
             <a:fld id="{289F147A-C75C-4EE1-85A0-F1BDEA974B7A}" type="datetimeFigureOut">
               <a:rPr lang="nl-NL" smtClean="0"/>
-              <a:t>27-5-2026</a:t>
+              <a:t>28-5-2026</a:t>
             </a:fld>
             <a:endParaRPr lang="nl-NL"/>
           </a:p>
@@ -2384,7 +2384,7 @@
           <a:p>
             <a:fld id="{289F147A-C75C-4EE1-85A0-F1BDEA974B7A}" type="datetimeFigureOut">
               <a:rPr lang="nl-NL" smtClean="0"/>
-              <a:t>27-5-2026</a:t>
+              <a:t>28-5-2026</a:t>
             </a:fld>
             <a:endParaRPr lang="nl-NL"/>
           </a:p>
@@ -2672,7 +2672,7 @@
           <a:p>
             <a:fld id="{289F147A-C75C-4EE1-85A0-F1BDEA974B7A}" type="datetimeFigureOut">
               <a:rPr lang="nl-NL" smtClean="0"/>
-              <a:t>27-5-2026</a:t>
+              <a:t>28-5-2026</a:t>
             </a:fld>
             <a:endParaRPr lang="nl-NL"/>
           </a:p>
@@ -2913,7 +2913,7 @@
           <a:p>
             <a:fld id="{289F147A-C75C-4EE1-85A0-F1BDEA974B7A}" type="datetimeFigureOut">
               <a:rPr lang="nl-NL" smtClean="0"/>
-              <a:t>27-5-2026</a:t>
+              <a:t>28-5-2026</a:t>
             </a:fld>
             <a:endParaRPr lang="nl-NL"/>
           </a:p>
@@ -4238,7 +4238,12 @@
             <p:ph idx="1"/>
           </p:nvPr>
         </p:nvSpPr>
-        <p:spPr/>
+        <p:spPr>
+          <a:xfrm>
+            <a:off x="442547" y="1543522"/>
+            <a:ext cx="10515600" cy="4351338"/>
+          </a:xfrm>
+        </p:spPr>
         <p:txBody>
           <a:bodyPr/>
           <a:lstStyle/>
@@ -4688,187 +4693,10 @@
             </a:lvl9pPr>
           </a:lstStyle>
           <a:p>
-            <a:r>
-              <a:rPr lang="en-US"/>
-              <a:t> Maak een leeg GameObject “Player”</a:t>
-            </a:r>
-          </a:p>
-          <a:p>
-            <a:r>
-              <a:rPr lang="en-US"/>
-              <a:t>Maak in “Player” een childObject met als naam “TankAnim”</a:t>
-            </a:r>
-          </a:p>
-          <a:p>
-            <a:r>
-              <a:rPr lang="en-US"/>
-              <a:t>Zet de animatie voor de Tank van de player op</a:t>
-            </a:r>
-          </a:p>
-          <a:p>
             <a:endParaRPr lang="nl-NL" dirty="0"/>
           </a:p>
         </p:txBody>
       </p:sp>
-      <p:grpSp>
-        <p:nvGrpSpPr>
-          <p:cNvPr id="10" name="Groep 9">
-            <a:extLst>
-              <a:ext uri="{FF2B5EF4-FFF2-40B4-BE49-F238E27FC236}">
-                <a16:creationId xmlns:a16="http://schemas.microsoft.com/office/drawing/2014/main" id="{E6A4793E-4F98-E5B7-02C0-01118B57D235}"/>
-              </a:ext>
-            </a:extLst>
-          </p:cNvPr>
-          <p:cNvGrpSpPr/>
-          <p:nvPr/>
-        </p:nvGrpSpPr>
-        <p:grpSpPr>
-          <a:xfrm>
-            <a:off x="1408951" y="3146897"/>
-            <a:ext cx="5611008" cy="1505160"/>
-            <a:chOff x="1136576" y="2849140"/>
-            <a:chExt cx="5611008" cy="1505160"/>
-          </a:xfrm>
-        </p:grpSpPr>
-        <p:pic>
-          <p:nvPicPr>
-            <p:cNvPr id="11" name="Afbeelding 10">
-              <a:extLst>
-                <a:ext uri="{FF2B5EF4-FFF2-40B4-BE49-F238E27FC236}">
-                  <a16:creationId xmlns:a16="http://schemas.microsoft.com/office/drawing/2014/main" id="{06E83C7E-6C0B-137E-82EC-F2FC5D24AF38}"/>
-                </a:ext>
-              </a:extLst>
-            </p:cNvPr>
-            <p:cNvPicPr>
-              <a:picLocks noChangeAspect="1"/>
-            </p:cNvPicPr>
-            <p:nvPr/>
-          </p:nvPicPr>
-          <p:blipFill>
-            <a:blip r:embed="rId2"/>
-            <a:stretch>
-              <a:fillRect/>
-            </a:stretch>
-          </p:blipFill>
-          <p:spPr>
-            <a:xfrm>
-              <a:off x="1136576" y="2849140"/>
-              <a:ext cx="5611008" cy="1505160"/>
-            </a:xfrm>
-            <a:prstGeom prst="rect">
-              <a:avLst/>
-            </a:prstGeom>
-          </p:spPr>
-        </p:pic>
-        <p:sp>
-          <p:nvSpPr>
-            <p:cNvPr id="12" name="Rechthoek 11">
-              <a:extLst>
-                <a:ext uri="{FF2B5EF4-FFF2-40B4-BE49-F238E27FC236}">
-                  <a16:creationId xmlns:a16="http://schemas.microsoft.com/office/drawing/2014/main" id="{BCD6A3B1-6A60-FEC6-A1FF-81C73FE76AB0}"/>
-                </a:ext>
-              </a:extLst>
-            </p:cNvPr>
-            <p:cNvSpPr/>
-            <p:nvPr/>
-          </p:nvSpPr>
-          <p:spPr>
-            <a:xfrm>
-              <a:off x="1930400" y="3637280"/>
-              <a:ext cx="4795520" cy="690880"/>
-            </a:xfrm>
-            <a:prstGeom prst="rect">
-              <a:avLst/>
-            </a:prstGeom>
-            <a:solidFill>
-              <a:schemeClr val="bg1"/>
-            </a:solidFill>
-            <a:ln>
-              <a:solidFill>
-                <a:schemeClr val="bg1"/>
-              </a:solidFill>
-            </a:ln>
-          </p:spPr>
-          <p:style>
-            <a:lnRef idx="2">
-              <a:schemeClr val="accent1">
-                <a:shade val="15000"/>
-              </a:schemeClr>
-            </a:lnRef>
-            <a:fillRef idx="1">
-              <a:schemeClr val="accent1"/>
-            </a:fillRef>
-            <a:effectRef idx="0">
-              <a:schemeClr val="accent1"/>
-            </a:effectRef>
-            <a:fontRef idx="minor">
-              <a:schemeClr val="lt1"/>
-            </a:fontRef>
-          </p:style>
-          <p:txBody>
-            <a:bodyPr rtlCol="0" anchor="ctr"/>
-            <a:lstStyle/>
-            <a:p>
-              <a:pPr algn="ctr"/>
-              <a:endParaRPr lang="nl-NL"/>
-            </a:p>
-          </p:txBody>
-        </p:sp>
-        <p:sp>
-          <p:nvSpPr>
-            <p:cNvPr id="13" name="Rechthoek 12">
-              <a:extLst>
-                <a:ext uri="{FF2B5EF4-FFF2-40B4-BE49-F238E27FC236}">
-                  <a16:creationId xmlns:a16="http://schemas.microsoft.com/office/drawing/2014/main" id="{BE0E3F16-7F4E-90DC-7F01-C3EF39FCB17D}"/>
-                </a:ext>
-              </a:extLst>
-            </p:cNvPr>
-            <p:cNvSpPr/>
-            <p:nvPr/>
-          </p:nvSpPr>
-          <p:spPr>
-            <a:xfrm>
-              <a:off x="1136576" y="2910840"/>
-              <a:ext cx="692224" cy="690880"/>
-            </a:xfrm>
-            <a:prstGeom prst="rect">
-              <a:avLst/>
-            </a:prstGeom>
-            <a:solidFill>
-              <a:schemeClr val="bg1"/>
-            </a:solidFill>
-            <a:ln>
-              <a:solidFill>
-                <a:schemeClr val="bg1"/>
-              </a:solidFill>
-            </a:ln>
-          </p:spPr>
-          <p:style>
-            <a:lnRef idx="2">
-              <a:schemeClr val="accent1">
-                <a:shade val="15000"/>
-              </a:schemeClr>
-            </a:lnRef>
-            <a:fillRef idx="1">
-              <a:schemeClr val="accent1"/>
-            </a:fillRef>
-            <a:effectRef idx="0">
-              <a:schemeClr val="accent1"/>
-            </a:effectRef>
-            <a:fontRef idx="minor">
-              <a:schemeClr val="lt1"/>
-            </a:fontRef>
-          </p:style>
-          <p:txBody>
-            <a:bodyPr rtlCol="0" anchor="ctr"/>
-            <a:lstStyle/>
-            <a:p>
-              <a:pPr algn="ctr"/>
-              <a:endParaRPr lang="nl-NL"/>
-            </a:p>
-          </p:txBody>
-        </p:sp>
-      </p:grpSp>
     </p:spTree>
     <p:extLst>
       <p:ext uri="{BB962C8B-B14F-4D97-AF65-F5344CB8AC3E}">

--- a/M4/GDV_2D_Gym/les4/m4-gym2d-les4.pptx
+++ b/M4/GDV_2D_Gym/les4/m4-gym2d-les4.pptx
@@ -10,6 +10,7 @@
     <p:sldId id="257" r:id="rId4"/>
     <p:sldId id="258" r:id="rId5"/>
     <p:sldId id="260" r:id="rId6"/>
+    <p:sldId id="261" r:id="rId7"/>
   </p:sldIdLst>
   <p:sldSz cx="12192000" cy="6858000"/>
   <p:notesSz cx="6858000" cy="9144000"/>
@@ -4701,6 +4702,115 @@
     <p:extLst>
       <p:ext uri="{BB962C8B-B14F-4D97-AF65-F5344CB8AC3E}">
         <p14:creationId xmlns:p14="http://schemas.microsoft.com/office/powerpoint/2010/main" val="2334937128"/>
+      </p:ext>
+    </p:extLst>
+  </p:cSld>
+  <p:clrMapOvr>
+    <a:masterClrMapping/>
+  </p:clrMapOvr>
+</p:sld>
+</file>
+
+<file path=ppt/slides/slide6.xml><?xml version="1.0" encoding="utf-8"?>
+<p:sld xmlns:a="http://schemas.openxmlformats.org/drawingml/2006/main" xmlns:r="http://schemas.openxmlformats.org/officeDocument/2006/relationships" xmlns:p="http://schemas.openxmlformats.org/presentationml/2006/main">
+  <p:cSld>
+    <p:spTree>
+      <p:nvGrpSpPr>
+        <p:cNvPr id="1" name=""/>
+        <p:cNvGrpSpPr/>
+        <p:nvPr/>
+      </p:nvGrpSpPr>
+      <p:grpSpPr>
+        <a:xfrm>
+          <a:off x="0" y="0"/>
+          <a:ext cx="0" cy="0"/>
+          <a:chOff x="0" y="0"/>
+          <a:chExt cx="0" cy="0"/>
+        </a:xfrm>
+      </p:grpSpPr>
+      <p:sp>
+        <p:nvSpPr>
+          <p:cNvPr id="2" name="Titel 1">
+            <a:extLst>
+              <a:ext uri="{FF2B5EF4-FFF2-40B4-BE49-F238E27FC236}">
+                <a16:creationId xmlns:a16="http://schemas.microsoft.com/office/drawing/2014/main" id="{57B263F1-48BF-54B8-10D7-EE654561AF85}"/>
+              </a:ext>
+            </a:extLst>
+          </p:cNvPr>
+          <p:cNvSpPr>
+            <a:spLocks noGrp="1"/>
+          </p:cNvSpPr>
+          <p:nvPr>
+            <p:ph type="title"/>
+          </p:nvPr>
+        </p:nvSpPr>
+        <p:spPr/>
+        <p:txBody>
+          <a:bodyPr/>
+          <a:lstStyle/>
+          <a:p>
+            <a:r>
+              <a:rPr lang="en-US" dirty="0"/>
+              <a:t>Laat de Tank </a:t>
+            </a:r>
+            <a:r>
+              <a:rPr lang="en-US" dirty="0" err="1"/>
+              <a:t>bewegen</a:t>
+            </a:r>
+            <a:r>
+              <a:rPr lang="en-US" dirty="0"/>
+              <a:t> met de </a:t>
+            </a:r>
+            <a:r>
+              <a:rPr lang="en-US" dirty="0" err="1"/>
+              <a:t>pijltjes-toetsen</a:t>
+            </a:r>
+            <a:endParaRPr lang="nl-NL" dirty="0"/>
+          </a:p>
+        </p:txBody>
+      </p:sp>
+      <p:pic>
+        <p:nvPicPr>
+          <p:cNvPr id="5" name="Tijdelijke aanduiding voor inhoud 4">
+            <a:extLst>
+              <a:ext uri="{FF2B5EF4-FFF2-40B4-BE49-F238E27FC236}">
+                <a16:creationId xmlns:a16="http://schemas.microsoft.com/office/drawing/2014/main" id="{DC27144C-5671-5BAB-3D3A-767D14FCB40A}"/>
+              </a:ext>
+            </a:extLst>
+          </p:cNvPr>
+          <p:cNvPicPr>
+            <a:picLocks noGrp="1" noChangeAspect="1"/>
+          </p:cNvPicPr>
+          <p:nvPr>
+            <p:ph idx="1"/>
+          </p:nvPr>
+        </p:nvPicPr>
+        <p:blipFill>
+          <a:blip r:embed="rId2">
+            <a:extLst>
+              <a:ext uri="{28A0092B-C50C-407E-A947-70E740481C1C}">
+                <a14:useLocalDpi xmlns:a14="http://schemas.microsoft.com/office/drawing/2010/main" val="0"/>
+              </a:ext>
+            </a:extLst>
+          </a:blip>
+          <a:stretch>
+            <a:fillRect/>
+          </a:stretch>
+        </p:blipFill>
+        <p:spPr>
+          <a:xfrm>
+            <a:off x="2709862" y="2067719"/>
+            <a:ext cx="6772275" cy="3867150"/>
+          </a:xfrm>
+          <a:prstGeom prst="rect">
+            <a:avLst/>
+          </a:prstGeom>
+        </p:spPr>
+      </p:pic>
+    </p:spTree>
+    <p:extLst>
+      <p:ext uri="{BB962C8B-B14F-4D97-AF65-F5344CB8AC3E}">
+        <p14:creationId xmlns:p14="http://schemas.microsoft.com/office/powerpoint/2010/main" val="628557130"/>
       </p:ext>
     </p:extLst>
   </p:cSld>

--- a/M4/GDV_2D_Gym/les4/m4-gym2d-les4.pptx
+++ b/M4/GDV_2D_Gym/les4/m4-gym2d-les4.pptx
@@ -264,7 +264,7 @@
           <a:p>
             <a:fld id="{289F147A-C75C-4EE1-85A0-F1BDEA974B7A}" type="datetimeFigureOut">
               <a:rPr lang="nl-NL" smtClean="0"/>
-              <a:t>28-5-2026</a:t>
+              <a:t>27-5-2026</a:t>
             </a:fld>
             <a:endParaRPr lang="nl-NL"/>
           </a:p>
@@ -462,7 +462,7 @@
           <a:p>
             <a:fld id="{289F147A-C75C-4EE1-85A0-F1BDEA974B7A}" type="datetimeFigureOut">
               <a:rPr lang="nl-NL" smtClean="0"/>
-              <a:t>28-5-2026</a:t>
+              <a:t>27-5-2026</a:t>
             </a:fld>
             <a:endParaRPr lang="nl-NL"/>
           </a:p>
@@ -670,7 +670,7 @@
           <a:p>
             <a:fld id="{289F147A-C75C-4EE1-85A0-F1BDEA974B7A}" type="datetimeFigureOut">
               <a:rPr lang="nl-NL" smtClean="0"/>
-              <a:t>28-5-2026</a:t>
+              <a:t>27-5-2026</a:t>
             </a:fld>
             <a:endParaRPr lang="nl-NL"/>
           </a:p>
@@ -868,7 +868,7 @@
           <a:p>
             <a:fld id="{289F147A-C75C-4EE1-85A0-F1BDEA974B7A}" type="datetimeFigureOut">
               <a:rPr lang="nl-NL" smtClean="0"/>
-              <a:t>28-5-2026</a:t>
+              <a:t>27-5-2026</a:t>
             </a:fld>
             <a:endParaRPr lang="nl-NL"/>
           </a:p>
@@ -1143,7 +1143,7 @@
           <a:p>
             <a:fld id="{289F147A-C75C-4EE1-85A0-F1BDEA974B7A}" type="datetimeFigureOut">
               <a:rPr lang="nl-NL" smtClean="0"/>
-              <a:t>28-5-2026</a:t>
+              <a:t>27-5-2026</a:t>
             </a:fld>
             <a:endParaRPr lang="nl-NL"/>
           </a:p>
@@ -1408,7 +1408,7 @@
           <a:p>
             <a:fld id="{289F147A-C75C-4EE1-85A0-F1BDEA974B7A}" type="datetimeFigureOut">
               <a:rPr lang="nl-NL" smtClean="0"/>
-              <a:t>28-5-2026</a:t>
+              <a:t>27-5-2026</a:t>
             </a:fld>
             <a:endParaRPr lang="nl-NL"/>
           </a:p>
@@ -1820,7 +1820,7 @@
           <a:p>
             <a:fld id="{289F147A-C75C-4EE1-85A0-F1BDEA974B7A}" type="datetimeFigureOut">
               <a:rPr lang="nl-NL" smtClean="0"/>
-              <a:t>28-5-2026</a:t>
+              <a:t>27-5-2026</a:t>
             </a:fld>
             <a:endParaRPr lang="nl-NL"/>
           </a:p>
@@ -1961,7 +1961,7 @@
           <a:p>
             <a:fld id="{289F147A-C75C-4EE1-85A0-F1BDEA974B7A}" type="datetimeFigureOut">
               <a:rPr lang="nl-NL" smtClean="0"/>
-              <a:t>28-5-2026</a:t>
+              <a:t>27-5-2026</a:t>
             </a:fld>
             <a:endParaRPr lang="nl-NL"/>
           </a:p>
@@ -2074,7 +2074,7 @@
           <a:p>
             <a:fld id="{289F147A-C75C-4EE1-85A0-F1BDEA974B7A}" type="datetimeFigureOut">
               <a:rPr lang="nl-NL" smtClean="0"/>
-              <a:t>28-5-2026</a:t>
+              <a:t>27-5-2026</a:t>
             </a:fld>
             <a:endParaRPr lang="nl-NL"/>
           </a:p>
@@ -2385,7 +2385,7 @@
           <a:p>
             <a:fld id="{289F147A-C75C-4EE1-85A0-F1BDEA974B7A}" type="datetimeFigureOut">
               <a:rPr lang="nl-NL" smtClean="0"/>
-              <a:t>28-5-2026</a:t>
+              <a:t>27-5-2026</a:t>
             </a:fld>
             <a:endParaRPr lang="nl-NL"/>
           </a:p>
@@ -2673,7 +2673,7 @@
           <a:p>
             <a:fld id="{289F147A-C75C-4EE1-85A0-F1BDEA974B7A}" type="datetimeFigureOut">
               <a:rPr lang="nl-NL" smtClean="0"/>
-              <a:t>28-5-2026</a:t>
+              <a:t>27-5-2026</a:t>
             </a:fld>
             <a:endParaRPr lang="nl-NL"/>
           </a:p>
@@ -2914,7 +2914,7 @@
           <a:p>
             <a:fld id="{289F147A-C75C-4EE1-85A0-F1BDEA974B7A}" type="datetimeFigureOut">
               <a:rPr lang="nl-NL" smtClean="0"/>
-              <a:t>28-5-2026</a:t>
+              <a:t>27-5-2026</a:t>
             </a:fld>
             <a:endParaRPr lang="nl-NL"/>
           </a:p>
@@ -4208,18 +4208,24 @@
         </p:nvSpPr>
         <p:spPr/>
         <p:txBody>
-          <a:bodyPr/>
-          <a:lstStyle/>
-          <a:p>
-            <a:r>
-              <a:rPr lang="en-US" dirty="0" err="1"/>
+          <a:bodyPr>
+            <a:normAutofit/>
+          </a:bodyPr>
+          <a:lstStyle/>
+          <a:p>
+            <a:r>
+              <a:rPr lang="en-US" sz="2800" dirty="0" err="1"/>
               <a:t>Opzetten</a:t>
             </a:r>
             <a:r>
-              <a:rPr lang="en-US" dirty="0"/>
-              <a:t> Player</a:t>
-            </a:r>
-            <a:endParaRPr lang="nl-NL" dirty="0"/>
+              <a:rPr lang="en-US" sz="2800" dirty="0"/>
+              <a:t> </a:t>
+            </a:r>
+            <a:r>
+              <a:rPr lang="en-US" sz="2800" dirty="0" err="1"/>
+              <a:t>TankPlayer</a:t>
+            </a:r>
+            <a:endParaRPr lang="nl-NL" sz="2800" dirty="0"/>
           </a:p>
         </p:txBody>
       </p:sp>
@@ -4239,14 +4245,11 @@
             <p:ph idx="1"/>
           </p:nvPr>
         </p:nvSpPr>
-        <p:spPr>
-          <a:xfrm>
-            <a:off x="442547" y="1543522"/>
-            <a:ext cx="10515600" cy="4351338"/>
-          </a:xfrm>
-        </p:spPr>
-        <p:txBody>
-          <a:bodyPr/>
+        <p:spPr/>
+        <p:txBody>
+          <a:bodyPr>
+            <a:normAutofit/>
+          </a:bodyPr>
           <a:lstStyle/>
           <a:p>
             <a:r>
@@ -4275,13 +4278,29 @@
             </a:r>
             <a:r>
               <a:rPr lang="en-US" dirty="0"/>
-              <a:t> “Player”</a:t>
-            </a:r>
-          </a:p>
-          <a:p>
+              <a:t> “</a:t>
+            </a:r>
+            <a:r>
+              <a:rPr lang="en-US" dirty="0" err="1"/>
+              <a:t>TankPlayer</a:t>
+            </a:r>
             <a:r>
               <a:rPr lang="en-US" dirty="0"/>
-              <a:t>Maak in “Player” </a:t>
+              <a:t>”</a:t>
+            </a:r>
+          </a:p>
+          <a:p>
+            <a:r>
+              <a:rPr lang="en-US" dirty="0"/>
+              <a:t>Maak in “</a:t>
+            </a:r>
+            <a:r>
+              <a:rPr lang="en-US" dirty="0" err="1"/>
+              <a:t>TankPlayer</a:t>
+            </a:r>
+            <a:r>
+              <a:rPr lang="en-US" dirty="0"/>
+              <a:t>” </a:t>
             </a:r>
             <a:r>
               <a:rPr lang="en-US" dirty="0" err="1"/>
@@ -4335,7 +4354,15 @@
             </a:r>
             <a:r>
               <a:rPr lang="en-US" dirty="0"/>
-              <a:t> de Tank van de player op</a:t>
+              <a:t> de </a:t>
+            </a:r>
+            <a:r>
+              <a:rPr lang="en-US" dirty="0" err="1"/>
+              <a:t>TankAnim</a:t>
+            </a:r>
+            <a:r>
+              <a:rPr lang="en-US" dirty="0"/>
+              <a:t> van de player op </a:t>
             </a:r>
           </a:p>
           <a:p>
@@ -4343,165 +4370,6 @@
           </a:p>
         </p:txBody>
       </p:sp>
-      <p:grpSp>
-        <p:nvGrpSpPr>
-          <p:cNvPr id="8" name="Groep 7">
-            <a:extLst>
-              <a:ext uri="{FF2B5EF4-FFF2-40B4-BE49-F238E27FC236}">
-                <a16:creationId xmlns:a16="http://schemas.microsoft.com/office/drawing/2014/main" id="{86AF503C-E180-D133-A123-9CC3044E5903}"/>
-              </a:ext>
-            </a:extLst>
-          </p:cNvPr>
-          <p:cNvGrpSpPr/>
-          <p:nvPr/>
-        </p:nvGrpSpPr>
-        <p:grpSpPr>
-          <a:xfrm>
-            <a:off x="1233853" y="3429000"/>
-            <a:ext cx="5611008" cy="1505160"/>
-            <a:chOff x="1136576" y="2849140"/>
-            <a:chExt cx="5611008" cy="1505160"/>
-          </a:xfrm>
-        </p:grpSpPr>
-        <p:pic>
-          <p:nvPicPr>
-            <p:cNvPr id="5" name="Afbeelding 4">
-              <a:extLst>
-                <a:ext uri="{FF2B5EF4-FFF2-40B4-BE49-F238E27FC236}">
-                  <a16:creationId xmlns:a16="http://schemas.microsoft.com/office/drawing/2014/main" id="{20D80739-05C9-A678-64DD-56863E166A00}"/>
-                </a:ext>
-              </a:extLst>
-            </p:cNvPr>
-            <p:cNvPicPr>
-              <a:picLocks noChangeAspect="1"/>
-            </p:cNvPicPr>
-            <p:nvPr/>
-          </p:nvPicPr>
-          <p:blipFill>
-            <a:blip r:embed="rId2"/>
-            <a:stretch>
-              <a:fillRect/>
-            </a:stretch>
-          </p:blipFill>
-          <p:spPr>
-            <a:xfrm>
-              <a:off x="1136576" y="2849140"/>
-              <a:ext cx="5611008" cy="1505160"/>
-            </a:xfrm>
-            <a:prstGeom prst="rect">
-              <a:avLst/>
-            </a:prstGeom>
-          </p:spPr>
-        </p:pic>
-        <p:sp>
-          <p:nvSpPr>
-            <p:cNvPr id="6" name="Rechthoek 5">
-              <a:extLst>
-                <a:ext uri="{FF2B5EF4-FFF2-40B4-BE49-F238E27FC236}">
-                  <a16:creationId xmlns:a16="http://schemas.microsoft.com/office/drawing/2014/main" id="{2C93B4D6-7009-80BF-5AE6-7D4E19B9ADC3}"/>
-                </a:ext>
-              </a:extLst>
-            </p:cNvPr>
-            <p:cNvSpPr/>
-            <p:nvPr/>
-          </p:nvSpPr>
-          <p:spPr>
-            <a:xfrm>
-              <a:off x="1930400" y="3637280"/>
-              <a:ext cx="4795520" cy="690880"/>
-            </a:xfrm>
-            <a:prstGeom prst="rect">
-              <a:avLst/>
-            </a:prstGeom>
-            <a:solidFill>
-              <a:schemeClr val="bg1"/>
-            </a:solidFill>
-            <a:ln>
-              <a:solidFill>
-                <a:schemeClr val="bg1"/>
-              </a:solidFill>
-            </a:ln>
-          </p:spPr>
-          <p:style>
-            <a:lnRef idx="2">
-              <a:schemeClr val="accent1">
-                <a:shade val="15000"/>
-              </a:schemeClr>
-            </a:lnRef>
-            <a:fillRef idx="1">
-              <a:schemeClr val="accent1"/>
-            </a:fillRef>
-            <a:effectRef idx="0">
-              <a:schemeClr val="accent1"/>
-            </a:effectRef>
-            <a:fontRef idx="minor">
-              <a:schemeClr val="lt1"/>
-            </a:fontRef>
-          </p:style>
-          <p:txBody>
-            <a:bodyPr rtlCol="0" anchor="ctr"/>
-            <a:lstStyle/>
-            <a:p>
-              <a:pPr algn="ctr"/>
-              <a:endParaRPr lang="nl-NL"/>
-            </a:p>
-          </p:txBody>
-        </p:sp>
-        <p:sp>
-          <p:nvSpPr>
-            <p:cNvPr id="7" name="Rechthoek 6">
-              <a:extLst>
-                <a:ext uri="{FF2B5EF4-FFF2-40B4-BE49-F238E27FC236}">
-                  <a16:creationId xmlns:a16="http://schemas.microsoft.com/office/drawing/2014/main" id="{EB299D95-4D6D-E7C0-93AE-17CFB0B2844E}"/>
-                </a:ext>
-              </a:extLst>
-            </p:cNvPr>
-            <p:cNvSpPr/>
-            <p:nvPr/>
-          </p:nvSpPr>
-          <p:spPr>
-            <a:xfrm>
-              <a:off x="1136576" y="2910840"/>
-              <a:ext cx="692224" cy="690880"/>
-            </a:xfrm>
-            <a:prstGeom prst="rect">
-              <a:avLst/>
-            </a:prstGeom>
-            <a:solidFill>
-              <a:schemeClr val="bg1"/>
-            </a:solidFill>
-            <a:ln>
-              <a:solidFill>
-                <a:schemeClr val="bg1"/>
-              </a:solidFill>
-            </a:ln>
-          </p:spPr>
-          <p:style>
-            <a:lnRef idx="2">
-              <a:schemeClr val="accent1">
-                <a:shade val="15000"/>
-              </a:schemeClr>
-            </a:lnRef>
-            <a:fillRef idx="1">
-              <a:schemeClr val="accent1"/>
-            </a:fillRef>
-            <a:effectRef idx="0">
-              <a:schemeClr val="accent1"/>
-            </a:effectRef>
-            <a:fontRef idx="minor">
-              <a:schemeClr val="lt1"/>
-            </a:fontRef>
-          </p:style>
-          <p:txBody>
-            <a:bodyPr rtlCol="0" anchor="ctr"/>
-            <a:lstStyle/>
-            <a:p>
-              <a:pPr algn="ctr"/>
-              <a:endParaRPr lang="nl-NL"/>
-            </a:p>
-          </p:txBody>
-        </p:sp>
-      </p:grpSp>
       <p:sp>
         <p:nvSpPr>
           <p:cNvPr id="9" name="Tijdelijke aanduiding voor inhoud 2">
@@ -4698,6 +4566,244 @@
           </a:p>
         </p:txBody>
       </p:sp>
+      <p:grpSp>
+        <p:nvGrpSpPr>
+          <p:cNvPr id="10" name="Groep 9">
+            <a:extLst>
+              <a:ext uri="{FF2B5EF4-FFF2-40B4-BE49-F238E27FC236}">
+                <a16:creationId xmlns:a16="http://schemas.microsoft.com/office/drawing/2014/main" id="{E6A4793E-4F98-E5B7-02C0-01118B57D235}"/>
+              </a:ext>
+            </a:extLst>
+          </p:cNvPr>
+          <p:cNvGrpSpPr/>
+          <p:nvPr/>
+        </p:nvGrpSpPr>
+        <p:grpSpPr>
+          <a:xfrm>
+            <a:off x="1139776" y="3558842"/>
+            <a:ext cx="5611008" cy="1505160"/>
+            <a:chOff x="1136576" y="2849140"/>
+            <a:chExt cx="5611008" cy="1505160"/>
+          </a:xfrm>
+        </p:grpSpPr>
+        <p:pic>
+          <p:nvPicPr>
+            <p:cNvPr id="11" name="Afbeelding 10">
+              <a:extLst>
+                <a:ext uri="{FF2B5EF4-FFF2-40B4-BE49-F238E27FC236}">
+                  <a16:creationId xmlns:a16="http://schemas.microsoft.com/office/drawing/2014/main" id="{06E83C7E-6C0B-137E-82EC-F2FC5D24AF38}"/>
+                </a:ext>
+              </a:extLst>
+            </p:cNvPr>
+            <p:cNvPicPr>
+              <a:picLocks noChangeAspect="1"/>
+            </p:cNvPicPr>
+            <p:nvPr/>
+          </p:nvPicPr>
+          <p:blipFill>
+            <a:blip r:embed="rId2"/>
+            <a:stretch>
+              <a:fillRect/>
+            </a:stretch>
+          </p:blipFill>
+          <p:spPr>
+            <a:xfrm>
+              <a:off x="1136576" y="2849140"/>
+              <a:ext cx="5611008" cy="1505160"/>
+            </a:xfrm>
+            <a:prstGeom prst="rect">
+              <a:avLst/>
+            </a:prstGeom>
+          </p:spPr>
+        </p:pic>
+        <p:sp>
+          <p:nvSpPr>
+            <p:cNvPr id="12" name="Rechthoek 11">
+              <a:extLst>
+                <a:ext uri="{FF2B5EF4-FFF2-40B4-BE49-F238E27FC236}">
+                  <a16:creationId xmlns:a16="http://schemas.microsoft.com/office/drawing/2014/main" id="{BCD6A3B1-6A60-FEC6-A1FF-81C73FE76AB0}"/>
+                </a:ext>
+              </a:extLst>
+            </p:cNvPr>
+            <p:cNvSpPr/>
+            <p:nvPr/>
+          </p:nvSpPr>
+          <p:spPr>
+            <a:xfrm>
+              <a:off x="1930400" y="3637280"/>
+              <a:ext cx="4795520" cy="690880"/>
+            </a:xfrm>
+            <a:prstGeom prst="rect">
+              <a:avLst/>
+            </a:prstGeom>
+            <a:solidFill>
+              <a:schemeClr val="bg1"/>
+            </a:solidFill>
+            <a:ln>
+              <a:solidFill>
+                <a:schemeClr val="bg1"/>
+              </a:solidFill>
+            </a:ln>
+          </p:spPr>
+          <p:style>
+            <a:lnRef idx="2">
+              <a:schemeClr val="accent1">
+                <a:shade val="15000"/>
+              </a:schemeClr>
+            </a:lnRef>
+            <a:fillRef idx="1">
+              <a:schemeClr val="accent1"/>
+            </a:fillRef>
+            <a:effectRef idx="0">
+              <a:schemeClr val="accent1"/>
+            </a:effectRef>
+            <a:fontRef idx="minor">
+              <a:schemeClr val="lt1"/>
+            </a:fontRef>
+          </p:style>
+          <p:txBody>
+            <a:bodyPr rtlCol="0" anchor="ctr"/>
+            <a:lstStyle/>
+            <a:p>
+              <a:pPr algn="ctr"/>
+              <a:endParaRPr lang="nl-NL" sz="2800"/>
+            </a:p>
+          </p:txBody>
+        </p:sp>
+        <p:sp>
+          <p:nvSpPr>
+            <p:cNvPr id="13" name="Rechthoek 12">
+              <a:extLst>
+                <a:ext uri="{FF2B5EF4-FFF2-40B4-BE49-F238E27FC236}">
+                  <a16:creationId xmlns:a16="http://schemas.microsoft.com/office/drawing/2014/main" id="{BE0E3F16-7F4E-90DC-7F01-C3EF39FCB17D}"/>
+                </a:ext>
+              </a:extLst>
+            </p:cNvPr>
+            <p:cNvSpPr/>
+            <p:nvPr/>
+          </p:nvSpPr>
+          <p:spPr>
+            <a:xfrm>
+              <a:off x="1136576" y="2910840"/>
+              <a:ext cx="692224" cy="690880"/>
+            </a:xfrm>
+            <a:prstGeom prst="rect">
+              <a:avLst/>
+            </a:prstGeom>
+            <a:solidFill>
+              <a:schemeClr val="bg1"/>
+            </a:solidFill>
+            <a:ln>
+              <a:solidFill>
+                <a:schemeClr val="bg1"/>
+              </a:solidFill>
+            </a:ln>
+          </p:spPr>
+          <p:style>
+            <a:lnRef idx="2">
+              <a:schemeClr val="accent1">
+                <a:shade val="15000"/>
+              </a:schemeClr>
+            </a:lnRef>
+            <a:fillRef idx="1">
+              <a:schemeClr val="accent1"/>
+            </a:fillRef>
+            <a:effectRef idx="0">
+              <a:schemeClr val="accent1"/>
+            </a:effectRef>
+            <a:fontRef idx="minor">
+              <a:schemeClr val="lt1"/>
+            </a:fontRef>
+          </p:style>
+          <p:txBody>
+            <a:bodyPr rtlCol="0" anchor="ctr"/>
+            <a:lstStyle/>
+            <a:p>
+              <a:pPr algn="ctr"/>
+              <a:endParaRPr lang="nl-NL" sz="2800"/>
+            </a:p>
+          </p:txBody>
+        </p:sp>
+      </p:grpSp>
+      <p:sp>
+        <p:nvSpPr>
+          <p:cNvPr id="14" name="Tekstvak 13">
+            <a:extLst>
+              <a:ext uri="{FF2B5EF4-FFF2-40B4-BE49-F238E27FC236}">
+                <a16:creationId xmlns:a16="http://schemas.microsoft.com/office/drawing/2014/main" id="{68F435C1-F979-DC3B-A677-E82770194420}"/>
+              </a:ext>
+            </a:extLst>
+          </p:cNvPr>
+          <p:cNvSpPr txBox="1"/>
+          <p:nvPr/>
+        </p:nvSpPr>
+        <p:spPr>
+          <a:xfrm>
+            <a:off x="897280" y="5587228"/>
+            <a:ext cx="6096000" cy="523220"/>
+          </a:xfrm>
+          <a:prstGeom prst="rect">
+            <a:avLst/>
+          </a:prstGeom>
+          <a:noFill/>
+        </p:spPr>
+        <p:txBody>
+          <a:bodyPr wrap="square">
+            <a:spAutoFit/>
+          </a:bodyPr>
+          <a:lstStyle/>
+          <a:p>
+            <a:r>
+              <a:rPr lang="en-US" sz="2800" dirty="0"/>
+              <a:t>Draai de </a:t>
+            </a:r>
+            <a:r>
+              <a:rPr lang="en-US" sz="2800" dirty="0" err="1"/>
+              <a:t>TankAnim</a:t>
+            </a:r>
+            <a:r>
+              <a:rPr lang="en-US" sz="2800" dirty="0"/>
+              <a:t> -90° om de z-as </a:t>
+            </a:r>
+          </a:p>
+        </p:txBody>
+      </p:sp>
+      <p:pic>
+        <p:nvPicPr>
+          <p:cNvPr id="16" name="Afbeelding 15">
+            <a:extLst>
+              <a:ext uri="{FF2B5EF4-FFF2-40B4-BE49-F238E27FC236}">
+                <a16:creationId xmlns:a16="http://schemas.microsoft.com/office/drawing/2014/main" id="{01F16685-81AB-3C3B-52A2-DE0A18FFE16F}"/>
+              </a:ext>
+            </a:extLst>
+          </p:cNvPr>
+          <p:cNvPicPr>
+            <a:picLocks noChangeAspect="1"/>
+          </p:cNvPicPr>
+          <p:nvPr/>
+        </p:nvPicPr>
+        <p:blipFill>
+          <a:blip r:embed="rId3">
+            <a:extLst>
+              <a:ext uri="{28A0092B-C50C-407E-A947-70E740481C1C}">
+                <a14:useLocalDpi xmlns:a14="http://schemas.microsoft.com/office/drawing/2010/main" val="0"/>
+              </a:ext>
+            </a:extLst>
+          </a:blip>
+          <a:stretch>
+            <a:fillRect/>
+          </a:stretch>
+        </p:blipFill>
+        <p:spPr>
+          <a:xfrm>
+            <a:off x="6824249" y="5728093"/>
+            <a:ext cx="1952625" cy="400050"/>
+          </a:xfrm>
+          <a:prstGeom prst="rect">
+            <a:avLst/>
+          </a:prstGeom>
+        </p:spPr>
+      </p:pic>
     </p:spTree>
     <p:extLst>
       <p:ext uri="{BB962C8B-B14F-4D97-AF65-F5344CB8AC3E}">
@@ -4733,7 +4839,7 @@
           <p:cNvPr id="2" name="Titel 1">
             <a:extLst>
               <a:ext uri="{FF2B5EF4-FFF2-40B4-BE49-F238E27FC236}">
-                <a16:creationId xmlns:a16="http://schemas.microsoft.com/office/drawing/2014/main" id="{57B263F1-48BF-54B8-10D7-EE654561AF85}"/>
+                <a16:creationId xmlns:a16="http://schemas.microsoft.com/office/drawing/2014/main" id="{6CC1CC4D-2EED-A268-F90B-FAB9C526282F}"/>
               </a:ext>
             </a:extLst>
           </p:cNvPr>
@@ -4750,40 +4856,267 @@
           <a:lstStyle/>
           <a:p>
             <a:r>
-              <a:rPr lang="en-US" dirty="0"/>
-              <a:t>Laat de Tank </a:t>
-            </a:r>
-            <a:r>
-              <a:rPr lang="en-US" dirty="0" err="1"/>
-              <a:t>bewegen</a:t>
-            </a:r>
-            <a:r>
-              <a:rPr lang="en-US" dirty="0"/>
-              <a:t> met de </a:t>
-            </a:r>
-            <a:r>
-              <a:rPr lang="en-US" dirty="0" err="1"/>
-              <a:t>pijltjes-toetsen</a:t>
-            </a:r>
-            <a:endParaRPr lang="nl-NL" dirty="0"/>
+              <a:rPr lang="nl-NL" dirty="0"/>
+              <a:t>Koppel een script aan de </a:t>
+            </a:r>
+            <a:r>
+              <a:rPr lang="nl-NL" dirty="0" err="1"/>
+              <a:t>TankPlayer</a:t>
+            </a:r>
+            <a:endParaRPr lang="en-US" dirty="0"/>
+          </a:p>
+        </p:txBody>
+      </p:sp>
+      <p:sp>
+        <p:nvSpPr>
+          <p:cNvPr id="3" name="Tijdelijke aanduiding voor inhoud 2">
+            <a:extLst>
+              <a:ext uri="{FF2B5EF4-FFF2-40B4-BE49-F238E27FC236}">
+                <a16:creationId xmlns:a16="http://schemas.microsoft.com/office/drawing/2014/main" id="{20785772-4338-64CA-F9F2-0C02DF578A14}"/>
+              </a:ext>
+            </a:extLst>
+          </p:cNvPr>
+          <p:cNvSpPr>
+            <a:spLocks noGrp="1"/>
+          </p:cNvSpPr>
+          <p:nvPr>
+            <p:ph idx="1"/>
+          </p:nvPr>
+        </p:nvSpPr>
+        <p:spPr>
+          <a:xfrm>
+            <a:off x="838200" y="1825625"/>
+            <a:ext cx="10515600" cy="711098"/>
+          </a:xfrm>
+        </p:spPr>
+        <p:txBody>
+          <a:bodyPr>
+            <a:normAutofit/>
+          </a:bodyPr>
+          <a:lstStyle/>
+          <a:p>
+            <a:r>
+              <a:rPr lang="nl-NL" sz="2000" dirty="0"/>
+              <a:t>Voeg besturing toe aan de </a:t>
+            </a:r>
+            <a:r>
+              <a:rPr lang="nl-NL" sz="2000" dirty="0" err="1"/>
+              <a:t>TankPlayer</a:t>
+            </a:r>
+            <a:endParaRPr lang="en-US" sz="2000" dirty="0"/>
+          </a:p>
+        </p:txBody>
+      </p:sp>
+      <p:sp>
+        <p:nvSpPr>
+          <p:cNvPr id="5" name="Tekstvak 4">
+            <a:extLst>
+              <a:ext uri="{FF2B5EF4-FFF2-40B4-BE49-F238E27FC236}">
+                <a16:creationId xmlns:a16="http://schemas.microsoft.com/office/drawing/2014/main" id="{B4190442-9B52-D9F6-1F1E-216C13756B5F}"/>
+              </a:ext>
+            </a:extLst>
+          </p:cNvPr>
+          <p:cNvSpPr txBox="1"/>
+          <p:nvPr/>
+        </p:nvSpPr>
+        <p:spPr>
+          <a:xfrm>
+            <a:off x="452284" y="2877476"/>
+            <a:ext cx="12054348" cy="1477328"/>
+          </a:xfrm>
+          <a:prstGeom prst="rect">
+            <a:avLst/>
+          </a:prstGeom>
+          <a:noFill/>
+        </p:spPr>
+        <p:txBody>
+          <a:bodyPr wrap="square">
+            <a:spAutoFit/>
+          </a:bodyPr>
+          <a:lstStyle/>
+          <a:p>
+            <a:r>
+              <a:rPr lang="en-US" sz="1800" dirty="0" err="1">
+                <a:latin typeface="Courier New" panose="02070309020205020404" pitchFamily="49" charset="0"/>
+                <a:cs typeface="Courier New" panose="02070309020205020404" pitchFamily="49" charset="0"/>
+              </a:rPr>
+              <a:t>horizontalInput</a:t>
+            </a:r>
+            <a:r>
+              <a:rPr lang="en-US" sz="1800" dirty="0">
+                <a:latin typeface="Courier New" panose="02070309020205020404" pitchFamily="49" charset="0"/>
+                <a:cs typeface="Courier New" panose="02070309020205020404" pitchFamily="49" charset="0"/>
+              </a:rPr>
+              <a:t> = -</a:t>
+            </a:r>
+            <a:r>
+              <a:rPr lang="en-US" sz="1800" dirty="0" err="1">
+                <a:latin typeface="Courier New" panose="02070309020205020404" pitchFamily="49" charset="0"/>
+                <a:cs typeface="Courier New" panose="02070309020205020404" pitchFamily="49" charset="0"/>
+              </a:rPr>
+              <a:t>Input.GetAxis</a:t>
+            </a:r>
+            <a:r>
+              <a:rPr lang="en-US" sz="1800" dirty="0">
+                <a:latin typeface="Courier New" panose="02070309020205020404" pitchFamily="49" charset="0"/>
+                <a:cs typeface="Courier New" panose="02070309020205020404" pitchFamily="49" charset="0"/>
+              </a:rPr>
+              <a:t>("Horizontal");</a:t>
+            </a:r>
+          </a:p>
+          <a:p>
+            <a:r>
+              <a:rPr lang="en-US" sz="1800" dirty="0" err="1">
+                <a:latin typeface="Courier New" panose="02070309020205020404" pitchFamily="49" charset="0"/>
+                <a:cs typeface="Courier New" panose="02070309020205020404" pitchFamily="49" charset="0"/>
+              </a:rPr>
+              <a:t>transform.Rotate</a:t>
+            </a:r>
+            <a:r>
+              <a:rPr lang="en-US" sz="1800" dirty="0">
+                <a:latin typeface="Courier New" panose="02070309020205020404" pitchFamily="49" charset="0"/>
+                <a:cs typeface="Courier New" panose="02070309020205020404" pitchFamily="49" charset="0"/>
+              </a:rPr>
+              <a:t>(Vector3.forward, </a:t>
+            </a:r>
+            <a:r>
+              <a:rPr lang="en-US" sz="1800" dirty="0" err="1">
+                <a:latin typeface="Courier New" panose="02070309020205020404" pitchFamily="49" charset="0"/>
+                <a:cs typeface="Courier New" panose="02070309020205020404" pitchFamily="49" charset="0"/>
+              </a:rPr>
+              <a:t>horizontalInput</a:t>
+            </a:r>
+            <a:r>
+              <a:rPr lang="en-US" sz="1800" dirty="0">
+                <a:latin typeface="Courier New" panose="02070309020205020404" pitchFamily="49" charset="0"/>
+                <a:cs typeface="Courier New" panose="02070309020205020404" pitchFamily="49" charset="0"/>
+              </a:rPr>
+              <a:t> * </a:t>
+            </a:r>
+            <a:r>
+              <a:rPr lang="en-US" sz="1800" dirty="0" err="1">
+                <a:latin typeface="Courier New" panose="02070309020205020404" pitchFamily="49" charset="0"/>
+                <a:cs typeface="Courier New" panose="02070309020205020404" pitchFamily="49" charset="0"/>
+              </a:rPr>
+              <a:t>Time.deltaTime</a:t>
+            </a:r>
+            <a:r>
+              <a:rPr lang="en-US" sz="1800" dirty="0">
+                <a:latin typeface="Courier New" panose="02070309020205020404" pitchFamily="49" charset="0"/>
+                <a:cs typeface="Courier New" panose="02070309020205020404" pitchFamily="49" charset="0"/>
+              </a:rPr>
+              <a:t> * </a:t>
+            </a:r>
+            <a:r>
+              <a:rPr lang="en-US" dirty="0">
+                <a:latin typeface="Courier New" panose="02070309020205020404" pitchFamily="49" charset="0"/>
+                <a:cs typeface="Courier New" panose="02070309020205020404" pitchFamily="49" charset="0"/>
+              </a:rPr>
+              <a:t>100</a:t>
+            </a:r>
+            <a:r>
+              <a:rPr lang="en-US" sz="1800" dirty="0">
+                <a:latin typeface="Courier New" panose="02070309020205020404" pitchFamily="49" charset="0"/>
+                <a:cs typeface="Courier New" panose="02070309020205020404" pitchFamily="49" charset="0"/>
+              </a:rPr>
+              <a:t>f);</a:t>
+            </a:r>
+          </a:p>
+          <a:p>
+            <a:endParaRPr lang="en-US" sz="1800" dirty="0">
+              <a:latin typeface="Courier New" panose="02070309020205020404" pitchFamily="49" charset="0"/>
+              <a:cs typeface="Courier New" panose="02070309020205020404" pitchFamily="49" charset="0"/>
+            </a:endParaRPr>
+          </a:p>
+          <a:p>
+            <a:r>
+              <a:rPr lang="en-US" sz="1800" dirty="0" err="1">
+                <a:latin typeface="Courier New" panose="02070309020205020404" pitchFamily="49" charset="0"/>
+                <a:cs typeface="Courier New" panose="02070309020205020404" pitchFamily="49" charset="0"/>
+              </a:rPr>
+              <a:t>verticalInput</a:t>
+            </a:r>
+            <a:r>
+              <a:rPr lang="en-US" sz="1800" dirty="0">
+                <a:latin typeface="Courier New" panose="02070309020205020404" pitchFamily="49" charset="0"/>
+                <a:cs typeface="Courier New" panose="02070309020205020404" pitchFamily="49" charset="0"/>
+              </a:rPr>
+              <a:t> = </a:t>
+            </a:r>
+            <a:r>
+              <a:rPr lang="en-US" sz="1800" dirty="0" err="1">
+                <a:latin typeface="Courier New" panose="02070309020205020404" pitchFamily="49" charset="0"/>
+                <a:cs typeface="Courier New" panose="02070309020205020404" pitchFamily="49" charset="0"/>
+              </a:rPr>
+              <a:t>Input.GetAxis</a:t>
+            </a:r>
+            <a:r>
+              <a:rPr lang="en-US" sz="1800" dirty="0">
+                <a:latin typeface="Courier New" panose="02070309020205020404" pitchFamily="49" charset="0"/>
+                <a:cs typeface="Courier New" panose="02070309020205020404" pitchFamily="49" charset="0"/>
+              </a:rPr>
+              <a:t>("Vertical");</a:t>
+            </a:r>
+          </a:p>
+          <a:p>
+            <a:r>
+              <a:rPr lang="en-US" sz="1800" dirty="0" err="1">
+                <a:latin typeface="Courier New" panose="02070309020205020404" pitchFamily="49" charset="0"/>
+                <a:cs typeface="Courier New" panose="02070309020205020404" pitchFamily="49" charset="0"/>
+              </a:rPr>
+              <a:t>transform.Translate</a:t>
+            </a:r>
+            <a:r>
+              <a:rPr lang="en-US" sz="1800" dirty="0">
+                <a:latin typeface="Courier New" panose="02070309020205020404" pitchFamily="49" charset="0"/>
+                <a:cs typeface="Courier New" panose="02070309020205020404" pitchFamily="49" charset="0"/>
+              </a:rPr>
+              <a:t>(Vector3.right * </a:t>
+            </a:r>
+            <a:r>
+              <a:rPr lang="en-US" sz="1800" dirty="0" err="1">
+                <a:latin typeface="Courier New" panose="02070309020205020404" pitchFamily="49" charset="0"/>
+                <a:cs typeface="Courier New" panose="02070309020205020404" pitchFamily="49" charset="0"/>
+              </a:rPr>
+              <a:t>verticalInput</a:t>
+            </a:r>
+            <a:r>
+              <a:rPr lang="en-US" sz="1800" dirty="0">
+                <a:latin typeface="Courier New" panose="02070309020205020404" pitchFamily="49" charset="0"/>
+                <a:cs typeface="Courier New" panose="02070309020205020404" pitchFamily="49" charset="0"/>
+              </a:rPr>
+              <a:t> * </a:t>
+            </a:r>
+            <a:r>
+              <a:rPr lang="en-US" sz="1800" dirty="0" err="1">
+                <a:latin typeface="Courier New" panose="02070309020205020404" pitchFamily="49" charset="0"/>
+                <a:cs typeface="Courier New" panose="02070309020205020404" pitchFamily="49" charset="0"/>
+              </a:rPr>
+              <a:t>Time.deltaTime</a:t>
+            </a:r>
+            <a:r>
+              <a:rPr lang="en-US" sz="1800" dirty="0">
+                <a:latin typeface="Courier New" panose="02070309020205020404" pitchFamily="49" charset="0"/>
+                <a:cs typeface="Courier New" panose="02070309020205020404" pitchFamily="49" charset="0"/>
+              </a:rPr>
+              <a:t> * speed);</a:t>
+            </a:r>
           </a:p>
         </p:txBody>
       </p:sp>
       <p:pic>
         <p:nvPicPr>
-          <p:cNvPr id="5" name="Tijdelijke aanduiding voor inhoud 4">
-            <a:extLst>
-              <a:ext uri="{FF2B5EF4-FFF2-40B4-BE49-F238E27FC236}">
-                <a16:creationId xmlns:a16="http://schemas.microsoft.com/office/drawing/2014/main" id="{DC27144C-5671-5BAB-3D3A-767D14FCB40A}"/>
+          <p:cNvPr id="7" name="Afbeelding 6">
+            <a:extLst>
+              <a:ext uri="{FF2B5EF4-FFF2-40B4-BE49-F238E27FC236}">
+                <a16:creationId xmlns:a16="http://schemas.microsoft.com/office/drawing/2014/main" id="{710B3FAC-D5CE-CF06-9F86-B58F00DD5CEF}"/>
               </a:ext>
             </a:extLst>
           </p:cNvPr>
           <p:cNvPicPr>
-            <a:picLocks noGrp="1" noChangeAspect="1"/>
+            <a:picLocks noChangeAspect="1"/>
           </p:cNvPicPr>
-          <p:nvPr>
-            <p:ph idx="1"/>
-          </p:nvPr>
+          <p:nvPr/>
         </p:nvPicPr>
         <p:blipFill>
           <a:blip r:embed="rId2">
@@ -4799,8 +5132,8 @@
         </p:blipFill>
         <p:spPr>
           <a:xfrm>
-            <a:off x="2709862" y="2067719"/>
-            <a:ext cx="6772275" cy="3867150"/>
+            <a:off x="3446514" y="4488118"/>
+            <a:ext cx="3981450" cy="2266950"/>
           </a:xfrm>
           <a:prstGeom prst="rect">
             <a:avLst/>
@@ -4810,7 +5143,7 @@
     </p:spTree>
     <p:extLst>
       <p:ext uri="{BB962C8B-B14F-4D97-AF65-F5344CB8AC3E}">
-        <p14:creationId xmlns:p14="http://schemas.microsoft.com/office/powerpoint/2010/main" val="628557130"/>
+        <p14:creationId xmlns:p14="http://schemas.microsoft.com/office/powerpoint/2010/main" val="3898097598"/>
       </p:ext>
     </p:extLst>
   </p:cSld>

--- a/M4/GDV_2D_Gym/les4/m4-gym2d-les4.pptx
+++ b/M4/GDV_2D_Gym/les4/m4-gym2d-les4.pptx
@@ -10,7 +10,10 @@
     <p:sldId id="257" r:id="rId4"/>
     <p:sldId id="258" r:id="rId5"/>
     <p:sldId id="260" r:id="rId6"/>
-    <p:sldId id="261" r:id="rId7"/>
+    <p:sldId id="265" r:id="rId7"/>
+    <p:sldId id="262" r:id="rId8"/>
+    <p:sldId id="264" r:id="rId9"/>
+    <p:sldId id="261" r:id="rId10"/>
   </p:sldIdLst>
   <p:sldSz cx="12192000" cy="6858000"/>
   <p:notesSz cx="6858000" cy="9144000"/>
@@ -264,7 +267,7 @@
           <a:p>
             <a:fld id="{289F147A-C75C-4EE1-85A0-F1BDEA974B7A}" type="datetimeFigureOut">
               <a:rPr lang="nl-NL" smtClean="0"/>
-              <a:t>27-5-2026</a:t>
+              <a:t>31-5-2026</a:t>
             </a:fld>
             <a:endParaRPr lang="nl-NL"/>
           </a:p>
@@ -462,7 +465,7 @@
           <a:p>
             <a:fld id="{289F147A-C75C-4EE1-85A0-F1BDEA974B7A}" type="datetimeFigureOut">
               <a:rPr lang="nl-NL" smtClean="0"/>
-              <a:t>27-5-2026</a:t>
+              <a:t>31-5-2026</a:t>
             </a:fld>
             <a:endParaRPr lang="nl-NL"/>
           </a:p>
@@ -670,7 +673,7 @@
           <a:p>
             <a:fld id="{289F147A-C75C-4EE1-85A0-F1BDEA974B7A}" type="datetimeFigureOut">
               <a:rPr lang="nl-NL" smtClean="0"/>
-              <a:t>27-5-2026</a:t>
+              <a:t>31-5-2026</a:t>
             </a:fld>
             <a:endParaRPr lang="nl-NL"/>
           </a:p>
@@ -868,7 +871,7 @@
           <a:p>
             <a:fld id="{289F147A-C75C-4EE1-85A0-F1BDEA974B7A}" type="datetimeFigureOut">
               <a:rPr lang="nl-NL" smtClean="0"/>
-              <a:t>27-5-2026</a:t>
+              <a:t>31-5-2026</a:t>
             </a:fld>
             <a:endParaRPr lang="nl-NL"/>
           </a:p>
@@ -1143,7 +1146,7 @@
           <a:p>
             <a:fld id="{289F147A-C75C-4EE1-85A0-F1BDEA974B7A}" type="datetimeFigureOut">
               <a:rPr lang="nl-NL" smtClean="0"/>
-              <a:t>27-5-2026</a:t>
+              <a:t>31-5-2026</a:t>
             </a:fld>
             <a:endParaRPr lang="nl-NL"/>
           </a:p>
@@ -1408,7 +1411,7 @@
           <a:p>
             <a:fld id="{289F147A-C75C-4EE1-85A0-F1BDEA974B7A}" type="datetimeFigureOut">
               <a:rPr lang="nl-NL" smtClean="0"/>
-              <a:t>27-5-2026</a:t>
+              <a:t>31-5-2026</a:t>
             </a:fld>
             <a:endParaRPr lang="nl-NL"/>
           </a:p>
@@ -1820,7 +1823,7 @@
           <a:p>
             <a:fld id="{289F147A-C75C-4EE1-85A0-F1BDEA974B7A}" type="datetimeFigureOut">
               <a:rPr lang="nl-NL" smtClean="0"/>
-              <a:t>27-5-2026</a:t>
+              <a:t>31-5-2026</a:t>
             </a:fld>
             <a:endParaRPr lang="nl-NL"/>
           </a:p>
@@ -1961,7 +1964,7 @@
           <a:p>
             <a:fld id="{289F147A-C75C-4EE1-85A0-F1BDEA974B7A}" type="datetimeFigureOut">
               <a:rPr lang="nl-NL" smtClean="0"/>
-              <a:t>27-5-2026</a:t>
+              <a:t>31-5-2026</a:t>
             </a:fld>
             <a:endParaRPr lang="nl-NL"/>
           </a:p>
@@ -2074,7 +2077,7 @@
           <a:p>
             <a:fld id="{289F147A-C75C-4EE1-85A0-F1BDEA974B7A}" type="datetimeFigureOut">
               <a:rPr lang="nl-NL" smtClean="0"/>
-              <a:t>27-5-2026</a:t>
+              <a:t>31-5-2026</a:t>
             </a:fld>
             <a:endParaRPr lang="nl-NL"/>
           </a:p>
@@ -2385,7 +2388,7 @@
           <a:p>
             <a:fld id="{289F147A-C75C-4EE1-85A0-F1BDEA974B7A}" type="datetimeFigureOut">
               <a:rPr lang="nl-NL" smtClean="0"/>
-              <a:t>27-5-2026</a:t>
+              <a:t>31-5-2026</a:t>
             </a:fld>
             <a:endParaRPr lang="nl-NL"/>
           </a:p>
@@ -2673,7 +2676,7 @@
           <a:p>
             <a:fld id="{289F147A-C75C-4EE1-85A0-F1BDEA974B7A}" type="datetimeFigureOut">
               <a:rPr lang="nl-NL" smtClean="0"/>
-              <a:t>27-5-2026</a:t>
+              <a:t>31-5-2026</a:t>
             </a:fld>
             <a:endParaRPr lang="nl-NL"/>
           </a:p>
@@ -2914,7 +2917,7 @@
           <a:p>
             <a:fld id="{289F147A-C75C-4EE1-85A0-F1BDEA974B7A}" type="datetimeFigureOut">
               <a:rPr lang="nl-NL" smtClean="0"/>
-              <a:t>27-5-2026</a:t>
+              <a:t>31-5-2026</a:t>
             </a:fld>
             <a:endParaRPr lang="nl-NL"/>
           </a:p>
@@ -4818,6 +4821,730 @@
 </file>
 
 <file path=ppt/slides/slide6.xml><?xml version="1.0" encoding="utf-8"?>
+<p:sld xmlns:a="http://schemas.openxmlformats.org/drawingml/2006/main" xmlns:r="http://schemas.openxmlformats.org/officeDocument/2006/relationships" xmlns:p="http://schemas.openxmlformats.org/presentationml/2006/main">
+  <p:cSld>
+    <p:spTree>
+      <p:nvGrpSpPr>
+        <p:cNvPr id="1" name=""/>
+        <p:cNvGrpSpPr/>
+        <p:nvPr/>
+      </p:nvGrpSpPr>
+      <p:grpSpPr>
+        <a:xfrm>
+          <a:off x="0" y="0"/>
+          <a:ext cx="0" cy="0"/>
+          <a:chOff x="0" y="0"/>
+          <a:chExt cx="0" cy="0"/>
+        </a:xfrm>
+      </p:grpSpPr>
+      <p:sp>
+        <p:nvSpPr>
+          <p:cNvPr id="4" name="Titel 3">
+            <a:extLst>
+              <a:ext uri="{FF2B5EF4-FFF2-40B4-BE49-F238E27FC236}">
+                <a16:creationId xmlns:a16="http://schemas.microsoft.com/office/drawing/2014/main" id="{0E5805D3-3932-B2E0-B85D-C6D01728A5B3}"/>
+              </a:ext>
+            </a:extLst>
+          </p:cNvPr>
+          <p:cNvSpPr>
+            <a:spLocks noGrp="1"/>
+          </p:cNvSpPr>
+          <p:nvPr>
+            <p:ph type="title"/>
+          </p:nvPr>
+        </p:nvSpPr>
+        <p:spPr/>
+        <p:txBody>
+          <a:bodyPr/>
+          <a:lstStyle/>
+          <a:p>
+            <a:r>
+              <a:rPr lang="nl-NL" dirty="0"/>
+              <a:t>Besturing van de tank</a:t>
+            </a:r>
+            <a:endParaRPr lang="en-US" dirty="0"/>
+          </a:p>
+        </p:txBody>
+      </p:sp>
+      <p:sp>
+        <p:nvSpPr>
+          <p:cNvPr id="5" name="Tijdelijke aanduiding voor tekst 4">
+            <a:extLst>
+              <a:ext uri="{FF2B5EF4-FFF2-40B4-BE49-F238E27FC236}">
+                <a16:creationId xmlns:a16="http://schemas.microsoft.com/office/drawing/2014/main" id="{33EEB4DB-886E-A6FF-A8C1-E385D57BE53D}"/>
+              </a:ext>
+            </a:extLst>
+          </p:cNvPr>
+          <p:cNvSpPr>
+            <a:spLocks noGrp="1"/>
+          </p:cNvSpPr>
+          <p:nvPr>
+            <p:ph type="body" idx="1"/>
+          </p:nvPr>
+        </p:nvSpPr>
+        <p:spPr/>
+        <p:txBody>
+          <a:bodyPr/>
+          <a:lstStyle/>
+          <a:p>
+            <a:endParaRPr lang="en-US"/>
+          </a:p>
+        </p:txBody>
+      </p:sp>
+    </p:spTree>
+    <p:extLst>
+      <p:ext uri="{BB962C8B-B14F-4D97-AF65-F5344CB8AC3E}">
+        <p14:creationId xmlns:p14="http://schemas.microsoft.com/office/powerpoint/2010/main" val="4048161842"/>
+      </p:ext>
+    </p:extLst>
+  </p:cSld>
+  <p:clrMapOvr>
+    <a:masterClrMapping/>
+  </p:clrMapOvr>
+</p:sld>
+</file>
+
+<file path=ppt/slides/slide7.xml><?xml version="1.0" encoding="utf-8"?>
+<p:sld xmlns:a="http://schemas.openxmlformats.org/drawingml/2006/main" xmlns:r="http://schemas.openxmlformats.org/officeDocument/2006/relationships" xmlns:p="http://schemas.openxmlformats.org/presentationml/2006/main">
+  <p:cSld>
+    <p:spTree>
+      <p:nvGrpSpPr>
+        <p:cNvPr id="1" name=""/>
+        <p:cNvGrpSpPr/>
+        <p:nvPr/>
+      </p:nvGrpSpPr>
+      <p:grpSpPr>
+        <a:xfrm>
+          <a:off x="0" y="0"/>
+          <a:ext cx="0" cy="0"/>
+          <a:chOff x="0" y="0"/>
+          <a:chExt cx="0" cy="0"/>
+        </a:xfrm>
+      </p:grpSpPr>
+      <p:sp>
+        <p:nvSpPr>
+          <p:cNvPr id="2" name="Titel 1">
+            <a:extLst>
+              <a:ext uri="{FF2B5EF4-FFF2-40B4-BE49-F238E27FC236}">
+                <a16:creationId xmlns:a16="http://schemas.microsoft.com/office/drawing/2014/main" id="{B7ECFD4D-821A-9AD4-5C1D-D8AC36622D64}"/>
+              </a:ext>
+            </a:extLst>
+          </p:cNvPr>
+          <p:cNvSpPr>
+            <a:spLocks noGrp="1"/>
+          </p:cNvSpPr>
+          <p:nvPr>
+            <p:ph type="title"/>
+          </p:nvPr>
+        </p:nvSpPr>
+        <p:spPr/>
+        <p:txBody>
+          <a:bodyPr/>
+          <a:lstStyle/>
+          <a:p>
+            <a:r>
+              <a:rPr lang="nl-NL" dirty="0" err="1"/>
+              <a:t>transform.Rotate</a:t>
+            </a:r>
+            <a:r>
+              <a:rPr lang="nl-NL" dirty="0"/>
+              <a:t>(as, hoeveel)</a:t>
+            </a:r>
+            <a:endParaRPr lang="en-US" dirty="0"/>
+          </a:p>
+        </p:txBody>
+      </p:sp>
+      <p:sp>
+        <p:nvSpPr>
+          <p:cNvPr id="6" name="Tekstvak 5">
+            <a:extLst>
+              <a:ext uri="{FF2B5EF4-FFF2-40B4-BE49-F238E27FC236}">
+                <a16:creationId xmlns:a16="http://schemas.microsoft.com/office/drawing/2014/main" id="{312EA4F4-6354-5102-2767-17EDEAE0A843}"/>
+              </a:ext>
+            </a:extLst>
+          </p:cNvPr>
+          <p:cNvSpPr txBox="1"/>
+          <p:nvPr/>
+        </p:nvSpPr>
+        <p:spPr>
+          <a:xfrm>
+            <a:off x="1514168" y="6123543"/>
+            <a:ext cx="8381672" cy="369332"/>
+          </a:xfrm>
+          <a:prstGeom prst="rect">
+            <a:avLst/>
+          </a:prstGeom>
+          <a:noFill/>
+        </p:spPr>
+        <p:txBody>
+          <a:bodyPr wrap="square">
+            <a:spAutoFit/>
+          </a:bodyPr>
+          <a:lstStyle/>
+          <a:p>
+            <a:r>
+              <a:rPr lang="en-US" sz="1800" dirty="0" err="1">
+                <a:latin typeface="Courier New" panose="02070309020205020404" pitchFamily="49" charset="0"/>
+                <a:cs typeface="Courier New" panose="02070309020205020404" pitchFamily="49" charset="0"/>
+              </a:rPr>
+              <a:t>transform.</a:t>
+            </a:r>
+            <a:r>
+              <a:rPr lang="en-US" dirty="0" err="1">
+                <a:latin typeface="Courier New" panose="02070309020205020404" pitchFamily="49" charset="0"/>
+                <a:cs typeface="Courier New" panose="02070309020205020404" pitchFamily="49" charset="0"/>
+              </a:rPr>
+              <a:t>Rotate</a:t>
+            </a:r>
+            <a:r>
+              <a:rPr lang="en-US" sz="1800" dirty="0">
+                <a:latin typeface="Courier New" panose="02070309020205020404" pitchFamily="49" charset="0"/>
+                <a:cs typeface="Courier New" panose="02070309020205020404" pitchFamily="49" charset="0"/>
+              </a:rPr>
+              <a:t>(Vector3.forward, </a:t>
+            </a:r>
+            <a:r>
+              <a:rPr lang="en-US" sz="1800" dirty="0" err="1">
+                <a:latin typeface="Courier New" panose="02070309020205020404" pitchFamily="49" charset="0"/>
+                <a:cs typeface="Courier New" panose="02070309020205020404" pitchFamily="49" charset="0"/>
+              </a:rPr>
+              <a:t>rotation_speed</a:t>
+            </a:r>
+            <a:r>
+              <a:rPr lang="en-US" sz="1800" dirty="0">
+                <a:latin typeface="Courier New" panose="02070309020205020404" pitchFamily="49" charset="0"/>
+                <a:cs typeface="Courier New" panose="02070309020205020404" pitchFamily="49" charset="0"/>
+              </a:rPr>
+              <a:t>);</a:t>
+            </a:r>
+          </a:p>
+        </p:txBody>
+      </p:sp>
+      <p:pic>
+        <p:nvPicPr>
+          <p:cNvPr id="9" name="Tijdelijke aanduiding voor inhoud 8">
+            <a:extLst>
+              <a:ext uri="{FF2B5EF4-FFF2-40B4-BE49-F238E27FC236}">
+                <a16:creationId xmlns:a16="http://schemas.microsoft.com/office/drawing/2014/main" id="{62DA5A72-87FB-C015-B7DD-EFAEA727F476}"/>
+              </a:ext>
+            </a:extLst>
+          </p:cNvPr>
+          <p:cNvPicPr>
+            <a:picLocks noGrp="1" noChangeAspect="1"/>
+          </p:cNvPicPr>
+          <p:nvPr>
+            <p:ph idx="1"/>
+          </p:nvPr>
+        </p:nvPicPr>
+        <p:blipFill>
+          <a:blip r:embed="rId2"/>
+          <a:stretch>
+            <a:fillRect/>
+          </a:stretch>
+        </p:blipFill>
+        <p:spPr>
+          <a:xfrm>
+            <a:off x="2234276" y="1354931"/>
+            <a:ext cx="4655783" cy="4351338"/>
+          </a:xfrm>
+          <a:prstGeom prst="rect">
+            <a:avLst/>
+          </a:prstGeom>
+        </p:spPr>
+      </p:pic>
+      <p:sp>
+        <p:nvSpPr>
+          <p:cNvPr id="10" name="Pijl: links 9">
+            <a:extLst>
+              <a:ext uri="{FF2B5EF4-FFF2-40B4-BE49-F238E27FC236}">
+                <a16:creationId xmlns:a16="http://schemas.microsoft.com/office/drawing/2014/main" id="{00BC3C6E-48DF-EE72-B2C3-0E305E9813F8}"/>
+              </a:ext>
+            </a:extLst>
+          </p:cNvPr>
+          <p:cNvSpPr/>
+          <p:nvPr/>
+        </p:nvSpPr>
+        <p:spPr>
+          <a:xfrm>
+            <a:off x="7548880" y="3098800"/>
+            <a:ext cx="737255" cy="369332"/>
+          </a:xfrm>
+          <a:prstGeom prst="leftArrow">
+            <a:avLst/>
+          </a:prstGeom>
+        </p:spPr>
+        <p:style>
+          <a:lnRef idx="2">
+            <a:schemeClr val="accent1">
+              <a:shade val="15000"/>
+            </a:schemeClr>
+          </a:lnRef>
+          <a:fillRef idx="1">
+            <a:schemeClr val="accent1"/>
+          </a:fillRef>
+          <a:effectRef idx="0">
+            <a:schemeClr val="accent1"/>
+          </a:effectRef>
+          <a:fontRef idx="minor">
+            <a:schemeClr val="lt1"/>
+          </a:fontRef>
+        </p:style>
+        <p:txBody>
+          <a:bodyPr rtlCol="0" anchor="ctr"/>
+          <a:lstStyle/>
+          <a:p>
+            <a:pPr algn="ctr"/>
+            <a:endParaRPr lang="en-US"/>
+          </a:p>
+        </p:txBody>
+      </p:sp>
+      <p:sp>
+        <p:nvSpPr>
+          <p:cNvPr id="11" name="Pijl: links 10">
+            <a:extLst>
+              <a:ext uri="{FF2B5EF4-FFF2-40B4-BE49-F238E27FC236}">
+                <a16:creationId xmlns:a16="http://schemas.microsoft.com/office/drawing/2014/main" id="{0E923F57-AEC4-5B08-9C7A-BFEE732C7DD2}"/>
+              </a:ext>
+            </a:extLst>
+          </p:cNvPr>
+          <p:cNvSpPr/>
+          <p:nvPr/>
+        </p:nvSpPr>
+        <p:spPr>
+          <a:xfrm rot="10800000">
+            <a:off x="8438535" y="3098800"/>
+            <a:ext cx="737255" cy="369332"/>
+          </a:xfrm>
+          <a:prstGeom prst="leftArrow">
+            <a:avLst/>
+          </a:prstGeom>
+        </p:spPr>
+        <p:style>
+          <a:lnRef idx="2">
+            <a:schemeClr val="accent1">
+              <a:shade val="15000"/>
+            </a:schemeClr>
+          </a:lnRef>
+          <a:fillRef idx="1">
+            <a:schemeClr val="accent1"/>
+          </a:fillRef>
+          <a:effectRef idx="0">
+            <a:schemeClr val="accent1"/>
+          </a:effectRef>
+          <a:fontRef idx="minor">
+            <a:schemeClr val="lt1"/>
+          </a:fontRef>
+        </p:style>
+        <p:txBody>
+          <a:bodyPr rtlCol="0" anchor="ctr"/>
+          <a:lstStyle/>
+          <a:p>
+            <a:pPr algn="ctr"/>
+            <a:endParaRPr lang="en-US"/>
+          </a:p>
+        </p:txBody>
+      </p:sp>
+      <p:sp>
+        <p:nvSpPr>
+          <p:cNvPr id="13" name="Tekstvak 12">
+            <a:extLst>
+              <a:ext uri="{FF2B5EF4-FFF2-40B4-BE49-F238E27FC236}">
+                <a16:creationId xmlns:a16="http://schemas.microsoft.com/office/drawing/2014/main" id="{B074D27F-495B-E87E-8BE6-AB45B5F4B84A}"/>
+              </a:ext>
+            </a:extLst>
+          </p:cNvPr>
+          <p:cNvSpPr txBox="1"/>
+          <p:nvPr/>
+        </p:nvSpPr>
+        <p:spPr>
+          <a:xfrm>
+            <a:off x="7511949" y="3537783"/>
+            <a:ext cx="2445775" cy="369332"/>
+          </a:xfrm>
+          <a:prstGeom prst="rect">
+            <a:avLst/>
+          </a:prstGeom>
+          <a:noFill/>
+        </p:spPr>
+        <p:txBody>
+          <a:bodyPr wrap="square">
+            <a:spAutoFit/>
+          </a:bodyPr>
+          <a:lstStyle/>
+          <a:p>
+            <a:r>
+              <a:rPr lang="en-US" sz="1800" dirty="0">
+                <a:latin typeface="Courier New" panose="02070309020205020404" pitchFamily="49" charset="0"/>
+                <a:cs typeface="Courier New" panose="02070309020205020404" pitchFamily="49" charset="0"/>
+              </a:rPr>
+              <a:t>Horizontal ax</a:t>
+            </a:r>
+            <a:endParaRPr lang="en-US" dirty="0"/>
+          </a:p>
+        </p:txBody>
+      </p:sp>
+      <p:sp>
+        <p:nvSpPr>
+          <p:cNvPr id="15" name="Pijl: gekromd omhoog 14">
+            <a:extLst>
+              <a:ext uri="{FF2B5EF4-FFF2-40B4-BE49-F238E27FC236}">
+                <a16:creationId xmlns:a16="http://schemas.microsoft.com/office/drawing/2014/main" id="{C2341EC1-4C39-95D5-A1AA-84DEDF03CB1B}"/>
+              </a:ext>
+            </a:extLst>
+          </p:cNvPr>
+          <p:cNvSpPr/>
+          <p:nvPr/>
+        </p:nvSpPr>
+        <p:spPr>
+          <a:xfrm rot="10800000">
+            <a:off x="3205312" y="4129547"/>
+            <a:ext cx="619435" cy="418749"/>
+          </a:xfrm>
+          <a:prstGeom prst="curvedUpArrow">
+            <a:avLst/>
+          </a:prstGeom>
+        </p:spPr>
+        <p:style>
+          <a:lnRef idx="2">
+            <a:schemeClr val="accent1">
+              <a:shade val="15000"/>
+            </a:schemeClr>
+          </a:lnRef>
+          <a:fillRef idx="1">
+            <a:schemeClr val="accent1"/>
+          </a:fillRef>
+          <a:effectRef idx="0">
+            <a:schemeClr val="accent1"/>
+          </a:effectRef>
+          <a:fontRef idx="minor">
+            <a:schemeClr val="lt1"/>
+          </a:fontRef>
+        </p:style>
+        <p:txBody>
+          <a:bodyPr rtlCol="0" anchor="ctr"/>
+          <a:lstStyle/>
+          <a:p>
+            <a:pPr algn="ctr"/>
+            <a:endParaRPr lang="en-US">
+              <a:solidFill>
+                <a:schemeClr val="tx1"/>
+              </a:solidFill>
+            </a:endParaRPr>
+          </a:p>
+        </p:txBody>
+      </p:sp>
+    </p:spTree>
+    <p:extLst>
+      <p:ext uri="{BB962C8B-B14F-4D97-AF65-F5344CB8AC3E}">
+        <p14:creationId xmlns:p14="http://schemas.microsoft.com/office/powerpoint/2010/main" val="781248427"/>
+      </p:ext>
+    </p:extLst>
+  </p:cSld>
+  <p:clrMapOvr>
+    <a:masterClrMapping/>
+  </p:clrMapOvr>
+</p:sld>
+</file>
+
+<file path=ppt/slides/slide8.xml><?xml version="1.0" encoding="utf-8"?>
+<p:sld xmlns:a="http://schemas.openxmlformats.org/drawingml/2006/main" xmlns:r="http://schemas.openxmlformats.org/officeDocument/2006/relationships" xmlns:p="http://schemas.openxmlformats.org/presentationml/2006/main">
+  <p:cSld>
+    <p:spTree>
+      <p:nvGrpSpPr>
+        <p:cNvPr id="1" name="">
+          <a:extLst>
+            <a:ext uri="{FF2B5EF4-FFF2-40B4-BE49-F238E27FC236}">
+              <a16:creationId xmlns:a16="http://schemas.microsoft.com/office/drawing/2014/main" id="{5E8D7E20-1E3F-A491-8D69-4648E9408E40}"/>
+            </a:ext>
+          </a:extLst>
+        </p:cNvPr>
+        <p:cNvGrpSpPr/>
+        <p:nvPr/>
+      </p:nvGrpSpPr>
+      <p:grpSpPr>
+        <a:xfrm>
+          <a:off x="0" y="0"/>
+          <a:ext cx="0" cy="0"/>
+          <a:chOff x="0" y="0"/>
+          <a:chExt cx="0" cy="0"/>
+        </a:xfrm>
+      </p:grpSpPr>
+      <p:sp>
+        <p:nvSpPr>
+          <p:cNvPr id="2" name="Titel 1">
+            <a:extLst>
+              <a:ext uri="{FF2B5EF4-FFF2-40B4-BE49-F238E27FC236}">
+                <a16:creationId xmlns:a16="http://schemas.microsoft.com/office/drawing/2014/main" id="{407774B3-697A-87A2-7F26-5A934ED361C1}"/>
+              </a:ext>
+            </a:extLst>
+          </p:cNvPr>
+          <p:cNvSpPr>
+            <a:spLocks noGrp="1"/>
+          </p:cNvSpPr>
+          <p:nvPr>
+            <p:ph type="title"/>
+          </p:nvPr>
+        </p:nvSpPr>
+        <p:spPr/>
+        <p:txBody>
+          <a:bodyPr/>
+          <a:lstStyle/>
+          <a:p>
+            <a:r>
+              <a:rPr lang="nl-NL" dirty="0" err="1"/>
+              <a:t>transform.Translate</a:t>
+            </a:r>
+            <a:r>
+              <a:rPr lang="nl-NL" dirty="0"/>
+              <a:t>(vector)</a:t>
+            </a:r>
+            <a:endParaRPr lang="en-US" dirty="0"/>
+          </a:p>
+        </p:txBody>
+      </p:sp>
+      <p:sp>
+        <p:nvSpPr>
+          <p:cNvPr id="6" name="Tekstvak 5">
+            <a:extLst>
+              <a:ext uri="{FF2B5EF4-FFF2-40B4-BE49-F238E27FC236}">
+                <a16:creationId xmlns:a16="http://schemas.microsoft.com/office/drawing/2014/main" id="{1AD6B3F1-F389-FC28-BF29-CD7EFD5F8237}"/>
+              </a:ext>
+            </a:extLst>
+          </p:cNvPr>
+          <p:cNvSpPr txBox="1"/>
+          <p:nvPr/>
+        </p:nvSpPr>
+        <p:spPr>
+          <a:xfrm>
+            <a:off x="1514168" y="6123543"/>
+            <a:ext cx="8381672" cy="369332"/>
+          </a:xfrm>
+          <a:prstGeom prst="rect">
+            <a:avLst/>
+          </a:prstGeom>
+          <a:noFill/>
+        </p:spPr>
+        <p:txBody>
+          <a:bodyPr wrap="square">
+            <a:spAutoFit/>
+          </a:bodyPr>
+          <a:lstStyle/>
+          <a:p>
+            <a:r>
+              <a:rPr lang="en-US" sz="1800" dirty="0" err="1">
+                <a:latin typeface="Courier New" panose="02070309020205020404" pitchFamily="49" charset="0"/>
+                <a:cs typeface="Courier New" panose="02070309020205020404" pitchFamily="49" charset="0"/>
+              </a:rPr>
+              <a:t>transform.</a:t>
+            </a:r>
+            <a:r>
+              <a:rPr lang="en-US" dirty="0" err="1">
+                <a:latin typeface="Courier New" panose="02070309020205020404" pitchFamily="49" charset="0"/>
+                <a:cs typeface="Courier New" panose="02070309020205020404" pitchFamily="49" charset="0"/>
+              </a:rPr>
+              <a:t>Translate</a:t>
+            </a:r>
+            <a:r>
+              <a:rPr lang="en-US" sz="1800" dirty="0">
+                <a:latin typeface="Courier New" panose="02070309020205020404" pitchFamily="49" charset="0"/>
+                <a:cs typeface="Courier New" panose="02070309020205020404" pitchFamily="49" charset="0"/>
+              </a:rPr>
+              <a:t>(Vector3.right</a:t>
+            </a:r>
+            <a:r>
+              <a:rPr lang="en-US" dirty="0">
+                <a:latin typeface="Courier New" panose="02070309020205020404" pitchFamily="49" charset="0"/>
+                <a:cs typeface="Courier New" panose="02070309020205020404" pitchFamily="49" charset="0"/>
+              </a:rPr>
+              <a:t> *</a:t>
+            </a:r>
+            <a:r>
+              <a:rPr lang="en-US" sz="1800" dirty="0">
+                <a:latin typeface="Courier New" panose="02070309020205020404" pitchFamily="49" charset="0"/>
+                <a:cs typeface="Courier New" panose="02070309020205020404" pitchFamily="49" charset="0"/>
+              </a:rPr>
+              <a:t> speed);</a:t>
+            </a:r>
+          </a:p>
+        </p:txBody>
+      </p:sp>
+      <p:pic>
+        <p:nvPicPr>
+          <p:cNvPr id="9" name="Tijdelijke aanduiding voor inhoud 8">
+            <a:extLst>
+              <a:ext uri="{FF2B5EF4-FFF2-40B4-BE49-F238E27FC236}">
+                <a16:creationId xmlns:a16="http://schemas.microsoft.com/office/drawing/2014/main" id="{10A78BD2-A330-D827-6208-4AE090616B95}"/>
+              </a:ext>
+            </a:extLst>
+          </p:cNvPr>
+          <p:cNvPicPr>
+            <a:picLocks noGrp="1" noChangeAspect="1"/>
+          </p:cNvPicPr>
+          <p:nvPr>
+            <p:ph idx="1"/>
+          </p:nvPr>
+        </p:nvPicPr>
+        <p:blipFill>
+          <a:blip r:embed="rId2"/>
+          <a:stretch>
+            <a:fillRect/>
+          </a:stretch>
+        </p:blipFill>
+        <p:spPr>
+          <a:xfrm>
+            <a:off x="2234276" y="1354931"/>
+            <a:ext cx="4655783" cy="4351338"/>
+          </a:xfrm>
+          <a:prstGeom prst="rect">
+            <a:avLst/>
+          </a:prstGeom>
+        </p:spPr>
+      </p:pic>
+      <p:sp>
+        <p:nvSpPr>
+          <p:cNvPr id="3" name="Pijl: links 2">
+            <a:extLst>
+              <a:ext uri="{FF2B5EF4-FFF2-40B4-BE49-F238E27FC236}">
+                <a16:creationId xmlns:a16="http://schemas.microsoft.com/office/drawing/2014/main" id="{1E92F242-BFED-4CFC-3E2B-0AE70B2002C1}"/>
+              </a:ext>
+            </a:extLst>
+          </p:cNvPr>
+          <p:cNvSpPr/>
+          <p:nvPr/>
+        </p:nvSpPr>
+        <p:spPr>
+          <a:xfrm rot="16200000">
+            <a:off x="7725549" y="4703152"/>
+            <a:ext cx="737255" cy="369332"/>
+          </a:xfrm>
+          <a:prstGeom prst="leftArrow">
+            <a:avLst/>
+          </a:prstGeom>
+        </p:spPr>
+        <p:style>
+          <a:lnRef idx="2">
+            <a:schemeClr val="accent1">
+              <a:shade val="15000"/>
+            </a:schemeClr>
+          </a:lnRef>
+          <a:fillRef idx="1">
+            <a:schemeClr val="accent1"/>
+          </a:fillRef>
+          <a:effectRef idx="0">
+            <a:schemeClr val="accent1"/>
+          </a:effectRef>
+          <a:fontRef idx="minor">
+            <a:schemeClr val="lt1"/>
+          </a:fontRef>
+        </p:style>
+        <p:txBody>
+          <a:bodyPr rtlCol="0" anchor="ctr"/>
+          <a:lstStyle/>
+          <a:p>
+            <a:pPr algn="ctr"/>
+            <a:endParaRPr lang="en-US"/>
+          </a:p>
+        </p:txBody>
+      </p:sp>
+      <p:sp>
+        <p:nvSpPr>
+          <p:cNvPr id="4" name="Pijl: links 3">
+            <a:extLst>
+              <a:ext uri="{FF2B5EF4-FFF2-40B4-BE49-F238E27FC236}">
+                <a16:creationId xmlns:a16="http://schemas.microsoft.com/office/drawing/2014/main" id="{54A3BFA8-F102-1D24-DBE5-95E1ADF2B3FB}"/>
+              </a:ext>
+            </a:extLst>
+          </p:cNvPr>
+          <p:cNvSpPr/>
+          <p:nvPr/>
+        </p:nvSpPr>
+        <p:spPr>
+          <a:xfrm rot="5400000">
+            <a:off x="7732841" y="3757260"/>
+            <a:ext cx="737255" cy="369332"/>
+          </a:xfrm>
+          <a:prstGeom prst="leftArrow">
+            <a:avLst/>
+          </a:prstGeom>
+        </p:spPr>
+        <p:style>
+          <a:lnRef idx="2">
+            <a:schemeClr val="accent1">
+              <a:shade val="15000"/>
+            </a:schemeClr>
+          </a:lnRef>
+          <a:fillRef idx="1">
+            <a:schemeClr val="accent1"/>
+          </a:fillRef>
+          <a:effectRef idx="0">
+            <a:schemeClr val="accent1"/>
+          </a:effectRef>
+          <a:fontRef idx="minor">
+            <a:schemeClr val="lt1"/>
+          </a:fontRef>
+        </p:style>
+        <p:txBody>
+          <a:bodyPr rtlCol="0" anchor="ctr"/>
+          <a:lstStyle/>
+          <a:p>
+            <a:pPr algn="ctr"/>
+            <a:endParaRPr lang="en-US"/>
+          </a:p>
+        </p:txBody>
+      </p:sp>
+      <p:sp>
+        <p:nvSpPr>
+          <p:cNvPr id="5" name="Tekstvak 4">
+            <a:extLst>
+              <a:ext uri="{FF2B5EF4-FFF2-40B4-BE49-F238E27FC236}">
+                <a16:creationId xmlns:a16="http://schemas.microsoft.com/office/drawing/2014/main" id="{296324B5-62A2-0DB7-B6C8-DCE8CE302E89}"/>
+              </a:ext>
+            </a:extLst>
+          </p:cNvPr>
+          <p:cNvSpPr txBox="1"/>
+          <p:nvPr/>
+        </p:nvSpPr>
+        <p:spPr>
+          <a:xfrm>
+            <a:off x="8286135" y="4230206"/>
+            <a:ext cx="2445775" cy="369332"/>
+          </a:xfrm>
+          <a:prstGeom prst="rect">
+            <a:avLst/>
+          </a:prstGeom>
+          <a:noFill/>
+        </p:spPr>
+        <p:txBody>
+          <a:bodyPr wrap="square">
+            <a:spAutoFit/>
+          </a:bodyPr>
+          <a:lstStyle/>
+          <a:p>
+            <a:r>
+              <a:rPr lang="en-US" sz="1800" dirty="0">
+                <a:latin typeface="Courier New" panose="02070309020205020404" pitchFamily="49" charset="0"/>
+                <a:cs typeface="Courier New" panose="02070309020205020404" pitchFamily="49" charset="0"/>
+              </a:rPr>
+              <a:t>Vertical ax</a:t>
+            </a:r>
+            <a:endParaRPr lang="en-US" dirty="0"/>
+          </a:p>
+        </p:txBody>
+      </p:sp>
+    </p:spTree>
+    <p:extLst>
+      <p:ext uri="{BB962C8B-B14F-4D97-AF65-F5344CB8AC3E}">
+        <p14:creationId xmlns:p14="http://schemas.microsoft.com/office/powerpoint/2010/main" val="485439546"/>
+      </p:ext>
+    </p:extLst>
+  </p:cSld>
+  <p:clrMapOvr>
+    <a:masterClrMapping/>
+  </p:clrMapOvr>
+</p:sld>
+</file>
+
+<file path=ppt/slides/slide9.xml><?xml version="1.0" encoding="utf-8"?>
 <p:sld xmlns:a="http://schemas.openxmlformats.org/drawingml/2006/main" xmlns:r="http://schemas.openxmlformats.org/officeDocument/2006/relationships" xmlns:p="http://schemas.openxmlformats.org/presentationml/2006/main">
   <p:cSld>
     <p:spTree>
